--- a/docs/presentasjon/naviar-konsept.pptx
+++ b/docs/presentasjon/naviar-konsept.pptx
@@ -1708,9 +1708,9 @@
                 <a:solidFill>
                   <a:srgbClr val="FFFFFF"/>
                 </a:solidFill>
-                <a:latin typeface="Cambria" pitchFamily="34" charset="0"/>
-                <a:ea typeface="Cambria" pitchFamily="34" charset="-122"/>
-                <a:cs typeface="Cambria" pitchFamily="34" charset="-120"/>
+                <a:latin typeface="Arial" pitchFamily="34" charset="0"/>
+                <a:ea typeface="Arial" pitchFamily="34" charset="-122"/>
+                <a:cs typeface="Arial" pitchFamily="34" charset="-120"/>
               </a:rPr>
               <a:t>Tjenesten er definert</a:t>
             </a:r>
@@ -1728,9 +1728,9 @@
                 <a:solidFill>
                   <a:srgbClr val="FFFFFF"/>
                 </a:solidFill>
-                <a:latin typeface="Cambria" pitchFamily="34" charset="0"/>
-                <a:ea typeface="Cambria" pitchFamily="34" charset="-122"/>
-                <a:cs typeface="Cambria" pitchFamily="34" charset="-120"/>
+                <a:latin typeface="Arial" pitchFamily="34" charset="0"/>
+                <a:ea typeface="Arial" pitchFamily="34" charset="-122"/>
+                <a:cs typeface="Arial" pitchFamily="34" charset="-120"/>
               </a:rPr>
               <a:t>av det den nekter å lagre</a:t>
             </a:r>
@@ -1767,9 +1767,9 @@
                 <a:solidFill>
                   <a:srgbClr val="4CB99B"/>
                 </a:solidFill>
-                <a:latin typeface="Calibri" pitchFamily="34" charset="0"/>
-                <a:ea typeface="Calibri" pitchFamily="34" charset="-122"/>
-                <a:cs typeface="Calibri" pitchFamily="34" charset="-120"/>
+                <a:latin typeface="Arial" pitchFamily="34" charset="0"/>
+                <a:ea typeface="Arial" pitchFamily="34" charset="-122"/>
+                <a:cs typeface="Arial" pitchFamily="34" charset="-120"/>
               </a:rPr>
               <a:t>Naviar Care · hvordan konseptet ble til, og hva det er til for</a:t>
             </a:r>
@@ -1794,7 +1794,7 @@
           <a:noFill/>
           <a:ln w="15875">
             <a:solidFill>
-              <a:srgbClr val="9AA6BB"/>
+              <a:srgbClr val="FBF6EE"/>
             </a:solidFill>
             <a:prstDash val="solid"/>
           </a:ln>
@@ -1815,7 +1815,7 @@
             <a:avLst/>
           </a:prstGeom>
           <a:solidFill>
-            <a:srgbClr val="9AA6BB"/>
+            <a:srgbClr val="FBF6EE"/>
           </a:solidFill>
           <a:ln/>
         </p:spPr>
@@ -1836,7 +1836,7 @@
           </a:prstGeom>
           <a:ln w="15875">
             <a:solidFill>
-              <a:srgbClr val="9AA6BB"/>
+              <a:srgbClr val="FBF6EE"/>
             </a:solidFill>
             <a:prstDash val="solid"/>
           </a:ln>
@@ -1869,11 +1869,11 @@
             <a:r>
               <a:rPr lang="en-US" sz="1100" dirty="0">
                 <a:solidFill>
-                  <a:srgbClr val="9AA6BB"/>
-                </a:solidFill>
-                <a:latin typeface="Calibri" pitchFamily="34" charset="0"/>
-                <a:ea typeface="Calibri" pitchFamily="34" charset="-122"/>
-                <a:cs typeface="Calibri" pitchFamily="34" charset="-120"/>
+                  <a:srgbClr val="FBF6EE"/>
+                </a:solidFill>
+                <a:latin typeface="Arial" pitchFamily="34" charset="0"/>
+                <a:ea typeface="Arial" pitchFamily="34" charset="-122"/>
+                <a:cs typeface="Arial" pitchFamily="34" charset="-120"/>
               </a:rPr>
               <a:t>Deg</a:t>
             </a:r>
@@ -1908,11 +1908,11 @@
             <a:r>
               <a:rPr lang="en-US" sz="1100" dirty="0">
                 <a:solidFill>
-                  <a:srgbClr val="9AA6BB"/>
-                </a:solidFill>
-                <a:latin typeface="Calibri" pitchFamily="34" charset="0"/>
-                <a:ea typeface="Calibri" pitchFamily="34" charset="-122"/>
-                <a:cs typeface="Calibri" pitchFamily="34" charset="-120"/>
+                  <a:srgbClr val="FBF6EE"/>
+                </a:solidFill>
+                <a:latin typeface="Arial" pitchFamily="34" charset="0"/>
+                <a:ea typeface="Arial" pitchFamily="34" charset="-122"/>
+                <a:cs typeface="Arial" pitchFamily="34" charset="-120"/>
               </a:rPr>
               <a:t>Mamma</a:t>
             </a:r>
@@ -1920,6 +1920,30 @@
           </a:p>
         </p:txBody>
       </p:sp>
+      <p:pic>
+        <p:nvPicPr>
+          <p:cNvPr id="9" name="Image 0" descr="preencoded.png">    </p:cNvPr>
+          <p:cNvPicPr>
+            <a:picLocks noChangeAspect="1"/>
+          </p:cNvPicPr>
+          <p:nvPr/>
+        </p:nvPicPr>
+        <p:blipFill>
+          <a:blip r:embed="rId1"/>
+          <a:stretch>
+            <a:fillRect/>
+          </a:stretch>
+        </p:blipFill>
+        <p:spPr>
+          <a:xfrm>
+            <a:off x="822960" y="6199632"/>
+            <a:ext cx="1143000" cy="110642"/>
+          </a:xfrm>
+          <a:prstGeom prst="rect">
+            <a:avLst/>
+          </a:prstGeom>
+        </p:spPr>
+      </p:pic>
     </p:spTree>
   </p:cSld>
   <p:clrMapOvr>
@@ -1981,9 +2005,9 @@
                 <a:solidFill>
                   <a:srgbClr val="FFFFFF"/>
                 </a:solidFill>
-                <a:latin typeface="Cambria" pitchFamily="34" charset="0"/>
-                <a:ea typeface="Cambria" pitchFamily="34" charset="-122"/>
-                <a:cs typeface="Cambria" pitchFamily="34" charset="-120"/>
+                <a:latin typeface="Arial" pitchFamily="34" charset="0"/>
+                <a:ea typeface="Arial" pitchFamily="34" charset="-122"/>
+                <a:cs typeface="Arial" pitchFamily="34" charset="-120"/>
               </a:rPr>
               <a:t>Hvor det står</a:t>
             </a:r>
@@ -2020,9 +2044,9 @@
                 <a:solidFill>
                   <a:srgbClr val="4CB99B"/>
                 </a:solidFill>
-                <a:latin typeface="Cambria" pitchFamily="34" charset="0"/>
-                <a:ea typeface="Cambria" pitchFamily="34" charset="-122"/>
-                <a:cs typeface="Cambria" pitchFamily="34" charset="-120"/>
+                <a:latin typeface="Arial" pitchFamily="34" charset="0"/>
+                <a:ea typeface="Arial" pitchFamily="34" charset="-122"/>
+                <a:cs typeface="Arial" pitchFamily="34" charset="-120"/>
               </a:rPr>
               <a:t>324</a:t>
             </a:r>
@@ -2057,11 +2081,11 @@
             <a:r>
               <a:rPr lang="en-US" sz="1300" dirty="0">
                 <a:solidFill>
-                  <a:srgbClr val="9AA6BB"/>
-                </a:solidFill>
-                <a:latin typeface="Calibri" pitchFamily="34" charset="0"/>
-                <a:ea typeface="Calibri" pitchFamily="34" charset="-122"/>
-                <a:cs typeface="Calibri" pitchFamily="34" charset="-120"/>
+                  <a:srgbClr val="FBF6EE"/>
+                </a:solidFill>
+                <a:latin typeface="Arial" pitchFamily="34" charset="0"/>
+                <a:ea typeface="Arial" pitchFamily="34" charset="-122"/>
+                <a:cs typeface="Arial" pitchFamily="34" charset="-120"/>
               </a:rPr>
               <a:t>enhetstester</a:t>
             </a:r>
@@ -2098,9 +2122,9 @@
                 <a:solidFill>
                   <a:srgbClr val="4CB99B"/>
                 </a:solidFill>
-                <a:latin typeface="Cambria" pitchFamily="34" charset="0"/>
-                <a:ea typeface="Cambria" pitchFamily="34" charset="-122"/>
-                <a:cs typeface="Cambria" pitchFamily="34" charset="-120"/>
+                <a:latin typeface="Arial" pitchFamily="34" charset="0"/>
+                <a:ea typeface="Arial" pitchFamily="34" charset="-122"/>
+                <a:cs typeface="Arial" pitchFamily="34" charset="-120"/>
               </a:rPr>
               <a:t>153</a:t>
             </a:r>
@@ -2135,11 +2159,11 @@
             <a:r>
               <a:rPr lang="en-US" sz="1300" dirty="0">
                 <a:solidFill>
-                  <a:srgbClr val="9AA6BB"/>
-                </a:solidFill>
-                <a:latin typeface="Calibri" pitchFamily="34" charset="0"/>
-                <a:ea typeface="Calibri" pitchFamily="34" charset="-122"/>
-                <a:cs typeface="Calibri" pitchFamily="34" charset="-120"/>
+                  <a:srgbClr val="FBF6EE"/>
+                </a:solidFill>
+                <a:latin typeface="Arial" pitchFamily="34" charset="0"/>
+                <a:ea typeface="Arial" pitchFamily="34" charset="-122"/>
+                <a:cs typeface="Arial" pitchFamily="34" charset="-120"/>
               </a:rPr>
               <a:t>nettlesertester</a:t>
             </a:r>
@@ -2176,9 +2200,9 @@
                 <a:solidFill>
                   <a:srgbClr val="4CB99B"/>
                 </a:solidFill>
-                <a:latin typeface="Cambria" pitchFamily="34" charset="0"/>
-                <a:ea typeface="Cambria" pitchFamily="34" charset="-122"/>
-                <a:cs typeface="Cambria" pitchFamily="34" charset="-120"/>
+                <a:latin typeface="Arial" pitchFamily="34" charset="0"/>
+                <a:ea typeface="Arial" pitchFamily="34" charset="-122"/>
+                <a:cs typeface="Arial" pitchFamily="34" charset="-120"/>
               </a:rPr>
               <a:t>0</a:t>
             </a:r>
@@ -2213,11 +2237,11 @@
             <a:r>
               <a:rPr lang="en-US" sz="1300" dirty="0">
                 <a:solidFill>
-                  <a:srgbClr val="9AA6BB"/>
-                </a:solidFill>
-                <a:latin typeface="Calibri" pitchFamily="34" charset="0"/>
-                <a:ea typeface="Calibri" pitchFamily="34" charset="-122"/>
-                <a:cs typeface="Calibri" pitchFamily="34" charset="-120"/>
+                  <a:srgbClr val="FBF6EE"/>
+                </a:solidFill>
+                <a:latin typeface="Arial" pitchFamily="34" charset="0"/>
+                <a:ea typeface="Arial" pitchFamily="34" charset="-122"/>
+                <a:cs typeface="Arial" pitchFamily="34" charset="-120"/>
               </a:rPr>
               <a:t>feilende</a:t>
             </a:r>
@@ -2255,11 +2279,11 @@
             <a:r>
               <a:rPr lang="en-US" sz="1500" dirty="0">
                 <a:solidFill>
-                  <a:srgbClr val="C8D0DE"/>
-                </a:solidFill>
-                <a:latin typeface="Calibri" pitchFamily="34" charset="0"/>
-                <a:ea typeface="Calibri" pitchFamily="34" charset="-122"/>
-                <a:cs typeface="Calibri" pitchFamily="34" charset="-120"/>
+                  <a:srgbClr val="FBF6EE"/>
+                </a:solidFill>
+                <a:latin typeface="Arial" pitchFamily="34" charset="0"/>
+                <a:ea typeface="Arial" pitchFamily="34" charset="-122"/>
+                <a:cs typeface="Arial" pitchFamily="34" charset="-120"/>
               </a:rPr>
               <a:t>Personvernsperra er prøvd mot en ekte PostgreSQL: 79 tekster gjennom både nettleseren og databasen, null uenigheter. Krympingen i fire trinn er kjørt for ekte.</a:t>
             </a:r>
@@ -2296,9 +2320,9 @@
                 <a:solidFill>
                   <a:srgbClr val="4CB99B"/>
                 </a:solidFill>
-                <a:latin typeface="Calibri" pitchFamily="34" charset="0"/>
-                <a:ea typeface="Calibri" pitchFamily="34" charset="-122"/>
-                <a:cs typeface="Calibri" pitchFamily="34" charset="-120"/>
+                <a:latin typeface="Arial" pitchFamily="34" charset="0"/>
+                <a:ea typeface="Arial" pitchFamily="34" charset="-122"/>
+                <a:cs typeface="Arial" pitchFamily="34" charset="-120"/>
               </a:rPr>
               <a:t>Neste</a:t>
             </a:r>
@@ -2336,9 +2360,9 @@
                 <a:solidFill>
                   <a:srgbClr val="FFFFFF"/>
                 </a:solidFill>
-                <a:latin typeface="Calibri" pitchFamily="34" charset="0"/>
-                <a:ea typeface="Calibri" pitchFamily="34" charset="-122"/>
-                <a:cs typeface="Calibri" pitchFamily="34" charset="-120"/>
+                <a:latin typeface="Arial" pitchFamily="34" charset="0"/>
+                <a:ea typeface="Arial" pitchFamily="34" charset="-122"/>
+                <a:cs typeface="Arial" pitchFamily="34" charset="-120"/>
               </a:rPr>
               <a:t>Varemerket er ikke søkt opp – navnet er ikke bekreftet ledig</a:t>
             </a:r>
@@ -2376,9 +2400,9 @@
                 <a:solidFill>
                   <a:srgbClr val="FFFFFF"/>
                 </a:solidFill>
-                <a:latin typeface="Calibri" pitchFamily="34" charset="0"/>
-                <a:ea typeface="Calibri" pitchFamily="34" charset="-122"/>
-                <a:cs typeface="Calibri" pitchFamily="34" charset="-120"/>
+                <a:latin typeface="Arial" pitchFamily="34" charset="0"/>
+                <a:ea typeface="Arial" pitchFamily="34" charset="-122"/>
+                <a:cs typeface="Arial" pitchFamily="34" charset="-120"/>
               </a:rPr>
               <a:t>Tre avgjørelser om innlogging står åpne</a:t>
             </a:r>
@@ -2416,9 +2440,9 @@
                 <a:solidFill>
                   <a:srgbClr val="FFFFFF"/>
                 </a:solidFill>
-                <a:latin typeface="Calibri" pitchFamily="34" charset="0"/>
-                <a:ea typeface="Calibri" pitchFamily="34" charset="-122"/>
-                <a:cs typeface="Calibri" pitchFamily="34" charset="-120"/>
+                <a:latin typeface="Arial" pitchFamily="34" charset="0"/>
+                <a:ea typeface="Arial" pitchFamily="34" charset="-122"/>
+                <a:cs typeface="Arial" pitchFamily="34" charset="-120"/>
               </a:rPr>
               <a:t>Betaling for Klarhet krever fire juridiske avklaringer</a:t>
             </a:r>
@@ -2434,7 +2458,7 @@
         </p:nvSpPr>
         <p:spPr>
           <a:xfrm>
-            <a:off x="822960" y="6263640"/>
+            <a:off x="6675120" y="6263640"/>
             <a:ext cx="3840480" cy="0"/>
           </a:xfrm>
           <a:prstGeom prst="line">
@@ -2457,7 +2481,7 @@
         </p:nvSpPr>
         <p:spPr>
           <a:xfrm>
-            <a:off x="777240" y="6217920"/>
+            <a:off x="6629400" y="6217920"/>
             <a:ext cx="91440" cy="91440"/>
           </a:xfrm>
           <a:prstGeom prst="ellipse">
@@ -2477,7 +2501,7 @@
         </p:nvSpPr>
         <p:spPr>
           <a:xfrm>
-            <a:off x="4617720" y="6217920"/>
+            <a:off x="10469880" y="6217920"/>
             <a:ext cx="91440" cy="91440"/>
           </a:xfrm>
           <a:prstGeom prst="ellipse">
@@ -2491,6 +2515,30 @@
           </a:ln>
         </p:spPr>
       </p:sp>
+      <p:pic>
+        <p:nvPicPr>
+          <p:cNvPr id="17" name="Image 0" descr="preencoded.png">    </p:cNvPr>
+          <p:cNvPicPr>
+            <a:picLocks noChangeAspect="1"/>
+          </p:cNvPicPr>
+          <p:nvPr/>
+        </p:nvPicPr>
+        <p:blipFill>
+          <a:blip r:embed="rId1"/>
+          <a:stretch>
+            <a:fillRect/>
+          </a:stretch>
+        </p:blipFill>
+        <p:spPr>
+          <a:xfrm>
+            <a:off x="822960" y="6199632"/>
+            <a:ext cx="1143000" cy="110642"/>
+          </a:xfrm>
+          <a:prstGeom prst="rect">
+            <a:avLst/>
+          </a:prstGeom>
+        </p:spPr>
+      </p:pic>
     </p:spTree>
   </p:cSld>
   <p:clrMapOvr>
@@ -2552,9 +2600,9 @@
                 <a:solidFill>
                   <a:srgbClr val="101A2E"/>
                 </a:solidFill>
-                <a:latin typeface="Cambria" pitchFamily="34" charset="0"/>
-                <a:ea typeface="Cambria" pitchFamily="34" charset="-122"/>
-                <a:cs typeface="Cambria" pitchFamily="34" charset="-120"/>
+                <a:latin typeface="Arial" pitchFamily="34" charset="0"/>
+                <a:ea typeface="Arial" pitchFamily="34" charset="-122"/>
+                <a:cs typeface="Arial" pitchFamily="34" charset="-120"/>
               </a:rPr>
               <a:t>Problemet er en avstand</a:t>
             </a:r>
@@ -2594,9 +2642,9 @@
                 <a:solidFill>
                   <a:srgbClr val="101A2E"/>
                 </a:solidFill>
-                <a:latin typeface="Calibri" pitchFamily="34" charset="0"/>
-                <a:ea typeface="Calibri" pitchFamily="34" charset="-122"/>
-                <a:cs typeface="Calibri" pitchFamily="34" charset="-120"/>
+                <a:latin typeface="Arial" pitchFamily="34" charset="0"/>
+                <a:ea typeface="Arial" pitchFamily="34" charset="-122"/>
+                <a:cs typeface="Arial" pitchFamily="34" charset="-120"/>
               </a:rPr>
               <a:t>Hun vil bo hjemme. </a:t>
             </a:r>
@@ -2611,9 +2659,9 @@
                 <a:solidFill>
                   <a:srgbClr val="101A2E"/>
                 </a:solidFill>
-                <a:latin typeface="Calibri" pitchFamily="34" charset="0"/>
-                <a:ea typeface="Calibri" pitchFamily="34" charset="-122"/>
-                <a:cs typeface="Calibri" pitchFamily="34" charset="-120"/>
+                <a:latin typeface="Arial" pitchFamily="34" charset="0"/>
+                <a:ea typeface="Arial" pitchFamily="34" charset="-122"/>
+                <a:cs typeface="Arial" pitchFamily="34" charset="-120"/>
               </a:rPr>
               <a:t>Du bor et annet sted, og du kan ikke være der hver gang noe praktisk må ordnes.</a:t>
             </a:r>
@@ -2653,9 +2701,9 @@
                 <a:solidFill>
                   <a:srgbClr val="4A5568"/>
                 </a:solidFill>
-                <a:latin typeface="Calibri" pitchFamily="34" charset="0"/>
-                <a:ea typeface="Calibri" pitchFamily="34" charset="-122"/>
-                <a:cs typeface="Calibri" pitchFamily="34" charset="-120"/>
+                <a:latin typeface="Arial" pitchFamily="34" charset="0"/>
+                <a:ea typeface="Arial" pitchFamily="34" charset="-122"/>
+                <a:cs typeface="Arial" pitchFamily="34" charset="-120"/>
               </a:rPr>
               <a:t>Det finnes hjelp. Problemet er ikke mangel på tjenester – det er at ingen vet hva som faktisk skjedde, når, og av hvem.</a:t>
             </a:r>
@@ -2684,7 +2732,7 @@
           </a:solidFill>
           <a:ln w="12700">
             <a:solidFill>
-              <a:srgbClr val="E4DCCF"/>
+              <a:srgbClr val="DDE2EA"/>
             </a:solidFill>
             <a:prstDash val="solid"/>
           </a:ln>
@@ -2726,9 +2774,9 @@
                 <a:solidFill>
                   <a:srgbClr val="101A2E"/>
                 </a:solidFill>
-                <a:latin typeface="Cambria" pitchFamily="34" charset="0"/>
-                <a:ea typeface="Cambria" pitchFamily="34" charset="-122"/>
-                <a:cs typeface="Cambria" pitchFamily="34" charset="-120"/>
+                <a:latin typeface="Arial" pitchFamily="34" charset="0"/>
+                <a:ea typeface="Arial" pitchFamily="34" charset="-122"/>
+                <a:cs typeface="Arial" pitchFamily="34" charset="-120"/>
               </a:rPr>
               <a:t>Handle dagligvarer</a:t>
             </a:r>
@@ -2785,9 +2833,9 @@
                 <a:solidFill>
                   <a:srgbClr val="4A5568"/>
                 </a:solidFill>
-                <a:latin typeface="Calibri" pitchFamily="34" charset="0"/>
-                <a:ea typeface="Calibri" pitchFamily="34" charset="-122"/>
-                <a:cs typeface="Calibri" pitchFamily="34" charset="-120"/>
+                <a:latin typeface="Arial" pitchFamily="34" charset="0"/>
+                <a:ea typeface="Arial" pitchFamily="34" charset="-122"/>
+                <a:cs typeface="Arial" pitchFamily="34" charset="-120"/>
               </a:rPr>
               <a:t>Tirsdag 18.00</a:t>
             </a:r>
@@ -2844,9 +2892,9 @@
                 <a:solidFill>
                   <a:srgbClr val="4A5568"/>
                 </a:solidFill>
-                <a:latin typeface="Calibri" pitchFamily="34" charset="0"/>
-                <a:ea typeface="Calibri" pitchFamily="34" charset="-122"/>
-                <a:cs typeface="Calibri" pitchFamily="34" charset="-120"/>
+                <a:latin typeface="Arial" pitchFamily="34" charset="0"/>
+                <a:ea typeface="Arial" pitchFamily="34" charset="-122"/>
+                <a:cs typeface="Arial" pitchFamily="34" charset="-120"/>
               </a:rPr>
               <a:t>Sagene</a:t>
             </a:r>
@@ -2869,7 +2917,7 @@
             <a:avLst/>
           </a:prstGeom>
           <a:solidFill>
-            <a:srgbClr val="9AA6BB"/>
+            <a:srgbClr val="657084"/>
           </a:solidFill>
           <a:ln/>
         </p:spPr>
@@ -2903,9 +2951,9 @@
                 <a:solidFill>
                   <a:srgbClr val="4A5568"/>
                 </a:solidFill>
-                <a:latin typeface="Calibri" pitchFamily="34" charset="0"/>
-                <a:ea typeface="Calibri" pitchFamily="34" charset="-122"/>
-                <a:cs typeface="Calibri" pitchFamily="34" charset="-120"/>
+                <a:latin typeface="Arial" pitchFamily="34" charset="0"/>
+                <a:ea typeface="Arial" pitchFamily="34" charset="-122"/>
+                <a:cs typeface="Arial" pitchFamily="34" charset="-120"/>
               </a:rPr>
               <a:t>Venter på svar</a:t>
             </a:r>
@@ -2942,9 +2990,9 @@
                 <a:solidFill>
                   <a:srgbClr val="1F6F5C"/>
                 </a:solidFill>
-                <a:latin typeface="Calibri" pitchFamily="34" charset="0"/>
-                <a:ea typeface="Calibri" pitchFamily="34" charset="-122"/>
-                <a:cs typeface="Calibri" pitchFamily="34" charset="-120"/>
+                <a:latin typeface="Arial" pitchFamily="34" charset="0"/>
+                <a:ea typeface="Arial" pitchFamily="34" charset="-122"/>
+                <a:cs typeface="Arial" pitchFamily="34" charset="-120"/>
               </a:rPr>
               <a:t>Familien kan ordne. Den eldre bestemmer.</a:t>
             </a:r>
@@ -2952,59 +3000,30 @@
           </a:p>
         </p:txBody>
       </p:sp>
-      <p:sp>
-        <p:nvSpPr>
-          <p:cNvPr id="14" name="Text 12"/>
-          <p:cNvSpPr/>
-          <p:nvPr/>
-        </p:nvSpPr>
-        <p:spPr>
-          <a:xfrm>
-            <a:off x="822960" y="6172200"/>
-            <a:ext cx="2743200" cy="274320"/>
-          </a:xfrm>
-          <a:prstGeom prst="rect">
-            <a:avLst/>
-          </a:prstGeom>
-          <a:noFill/>
-          <a:ln/>
-        </p:spPr>
-        <p:txBody>
-          <a:bodyPr wrap="square" lIns="0" tIns="0" rIns="0" bIns="0" rtlCol="0" anchor="t"/>
-          <a:lstStyle/>
-          <a:p>
-            <a:pPr indent="0" marL="0">
-              <a:buNone/>
-            </a:pPr>
-            <a:r>
-              <a:rPr lang="en-US" sz="1000" b="1" spc="200" kern="0" dirty="0">
-                <a:solidFill>
-                  <a:srgbClr val="9AA6BB"/>
-                </a:solidFill>
-                <a:latin typeface="Calibri" pitchFamily="34" charset="0"/>
-                <a:ea typeface="Calibri" pitchFamily="34" charset="-122"/>
-                <a:cs typeface="Calibri" pitchFamily="34" charset="-120"/>
-              </a:rPr>
-              <a:t>NAVIAR </a:t>
-            </a:r>
-            <a:pPr indent="0" marL="0">
-              <a:buNone/>
-            </a:pPr>
-            <a:r>
-              <a:rPr lang="en-US" sz="1000" spc="200" kern="0" dirty="0">
-                <a:solidFill>
-                  <a:srgbClr val="9AA6BB"/>
-                </a:solidFill>
-                <a:latin typeface="Calibri" pitchFamily="34" charset="0"/>
-                <a:ea typeface="Calibri" pitchFamily="34" charset="-122"/>
-                <a:cs typeface="Calibri" pitchFamily="34" charset="-120"/>
-              </a:rPr>
-              <a:t>CARE</a:t>
-            </a:r>
-            <a:endParaRPr lang="en-US" sz="1000" dirty="0"/>
-          </a:p>
-        </p:txBody>
-      </p:sp>
+      <p:pic>
+        <p:nvPicPr>
+          <p:cNvPr id="14" name="Image 0" descr="preencoded.png">    </p:cNvPr>
+          <p:cNvPicPr>
+            <a:picLocks noChangeAspect="1"/>
+          </p:cNvPicPr>
+          <p:nvPr/>
+        </p:nvPicPr>
+        <p:blipFill>
+          <a:blip r:embed="rId1"/>
+          <a:stretch>
+            <a:fillRect/>
+          </a:stretch>
+        </p:blipFill>
+        <p:spPr>
+          <a:xfrm>
+            <a:off x="822960" y="6199632"/>
+            <a:ext cx="1143000" cy="110642"/>
+          </a:xfrm>
+          <a:prstGeom prst="rect">
+            <a:avLst/>
+          </a:prstGeom>
+        </p:spPr>
+      </p:pic>
     </p:spTree>
   </p:cSld>
   <p:clrMapOvr>
@@ -3066,9 +3085,9 @@
                 <a:solidFill>
                   <a:srgbClr val="101A2E"/>
                 </a:solidFill>
-                <a:latin typeface="Cambria" pitchFamily="34" charset="0"/>
-                <a:ea typeface="Cambria" pitchFamily="34" charset="-122"/>
-                <a:cs typeface="Cambria" pitchFamily="34" charset="-120"/>
+                <a:latin typeface="Arial" pitchFamily="34" charset="0"/>
+                <a:ea typeface="Arial" pitchFamily="34" charset="-122"/>
+                <a:cs typeface="Arial" pitchFamily="34" charset="-120"/>
               </a:rPr>
               <a:t>Setningen alt annet henger på</a:t>
             </a:r>
@@ -3097,7 +3116,7 @@
           </a:solidFill>
           <a:ln w="12700">
             <a:solidFill>
-              <a:srgbClr val="E4DCCF"/>
+              <a:srgbClr val="DDE2EA"/>
             </a:solidFill>
             <a:prstDash val="solid"/>
           </a:ln>
@@ -3135,9 +3154,9 @@
                 <a:solidFill>
                   <a:srgbClr val="101A2E"/>
                 </a:solidFill>
-                <a:latin typeface="Cambria" pitchFamily="34" charset="0"/>
-                <a:ea typeface="Cambria" pitchFamily="34" charset="-122"/>
-                <a:cs typeface="Cambria" pitchFamily="34" charset="-120"/>
+                <a:latin typeface="Arial" pitchFamily="34" charset="0"/>
+                <a:ea typeface="Arial" pitchFamily="34" charset="-122"/>
+                <a:cs typeface="Arial" pitchFamily="34" charset="-120"/>
               </a:rPr>
               <a:t>Naviar Care er en programvaretjeneste som hjelper verifiserte tjenesteleverandører med å planlegge, dokumentere og varsle om praktiske besøk utført av leverandørens egne ansatte.</a:t>
             </a:r>
@@ -3174,9 +3193,9 @@
                 <a:solidFill>
                   <a:srgbClr val="4A5568"/>
                 </a:solidFill>
-                <a:latin typeface="Calibri" pitchFamily="34" charset="0"/>
-                <a:ea typeface="Calibri" pitchFamily="34" charset="-122"/>
-                <a:cs typeface="Calibri" pitchFamily="34" charset="-120"/>
+                <a:latin typeface="Arial" pitchFamily="34" charset="0"/>
+                <a:ea typeface="Arial" pitchFamily="34" charset="-122"/>
+                <a:cs typeface="Arial" pitchFamily="34" charset="-120"/>
               </a:rPr>
               <a:t>Hver funksjon prøves mot den setningen. Naviar er ikke:</a:t>
             </a:r>
@@ -3240,9 +3259,9 @@
                 <a:solidFill>
                   <a:srgbClr val="4A5568"/>
                 </a:solidFill>
-                <a:latin typeface="Calibri" pitchFamily="34" charset="0"/>
-                <a:ea typeface="Calibri" pitchFamily="34" charset="-122"/>
-                <a:cs typeface="Calibri" pitchFamily="34" charset="-120"/>
+                <a:latin typeface="Arial" pitchFamily="34" charset="0"/>
+                <a:ea typeface="Arial" pitchFamily="34" charset="-122"/>
+                <a:cs typeface="Arial" pitchFamily="34" charset="-120"/>
               </a:rPr>
               <a:t>arbeidsgiver</a:t>
             </a:r>
@@ -3306,9 +3325,9 @@
                 <a:solidFill>
                   <a:srgbClr val="4A5568"/>
                 </a:solidFill>
-                <a:latin typeface="Calibri" pitchFamily="34" charset="0"/>
-                <a:ea typeface="Calibri" pitchFamily="34" charset="-122"/>
-                <a:cs typeface="Calibri" pitchFamily="34" charset="-120"/>
+                <a:latin typeface="Arial" pitchFamily="34" charset="0"/>
+                <a:ea typeface="Arial" pitchFamily="34" charset="-122"/>
+                <a:cs typeface="Arial" pitchFamily="34" charset="-120"/>
               </a:rPr>
               <a:t>leverandør av helsehjelp</a:t>
             </a:r>
@@ -3372,9 +3391,9 @@
                 <a:solidFill>
                   <a:srgbClr val="4A5568"/>
                 </a:solidFill>
-                <a:latin typeface="Calibri" pitchFamily="34" charset="0"/>
-                <a:ea typeface="Calibri" pitchFamily="34" charset="-122"/>
-                <a:cs typeface="Calibri" pitchFamily="34" charset="-120"/>
+                <a:latin typeface="Arial" pitchFamily="34" charset="0"/>
+                <a:ea typeface="Arial" pitchFamily="34" charset="-122"/>
+                <a:cs typeface="Arial" pitchFamily="34" charset="-120"/>
               </a:rPr>
               <a:t>nødtjeneste</a:t>
             </a:r>
@@ -3438,9 +3457,9 @@
                 <a:solidFill>
                   <a:srgbClr val="4A5568"/>
                 </a:solidFill>
-                <a:latin typeface="Calibri" pitchFamily="34" charset="0"/>
-                <a:ea typeface="Calibri" pitchFamily="34" charset="-122"/>
-                <a:cs typeface="Calibri" pitchFamily="34" charset="-120"/>
+                <a:latin typeface="Arial" pitchFamily="34" charset="0"/>
+                <a:ea typeface="Arial" pitchFamily="34" charset="-122"/>
+                <a:cs typeface="Arial" pitchFamily="34" charset="-120"/>
               </a:rPr>
               <a:t>faglig ansvarlig for medarbeiderne</a:t>
             </a:r>
@@ -3448,59 +3467,30 @@
           </a:p>
         </p:txBody>
       </p:sp>
-      <p:sp>
-        <p:nvSpPr>
-          <p:cNvPr id="14" name="Text 12"/>
-          <p:cNvSpPr/>
-          <p:nvPr/>
-        </p:nvSpPr>
-        <p:spPr>
-          <a:xfrm>
-            <a:off x="822960" y="6172200"/>
-            <a:ext cx="2743200" cy="274320"/>
-          </a:xfrm>
-          <a:prstGeom prst="rect">
-            <a:avLst/>
-          </a:prstGeom>
-          <a:noFill/>
-          <a:ln/>
-        </p:spPr>
-        <p:txBody>
-          <a:bodyPr wrap="square" lIns="0" tIns="0" rIns="0" bIns="0" rtlCol="0" anchor="t"/>
-          <a:lstStyle/>
-          <a:p>
-            <a:pPr indent="0" marL="0">
-              <a:buNone/>
-            </a:pPr>
-            <a:r>
-              <a:rPr lang="en-US" sz="1000" b="1" spc="200" kern="0" dirty="0">
-                <a:solidFill>
-                  <a:srgbClr val="9AA6BB"/>
-                </a:solidFill>
-                <a:latin typeface="Calibri" pitchFamily="34" charset="0"/>
-                <a:ea typeface="Calibri" pitchFamily="34" charset="-122"/>
-                <a:cs typeface="Calibri" pitchFamily="34" charset="-120"/>
-              </a:rPr>
-              <a:t>NAVIAR </a:t>
-            </a:r>
-            <a:pPr indent="0" marL="0">
-              <a:buNone/>
-            </a:pPr>
-            <a:r>
-              <a:rPr lang="en-US" sz="1000" spc="200" kern="0" dirty="0">
-                <a:solidFill>
-                  <a:srgbClr val="9AA6BB"/>
-                </a:solidFill>
-                <a:latin typeface="Calibri" pitchFamily="34" charset="0"/>
-                <a:ea typeface="Calibri" pitchFamily="34" charset="-122"/>
-                <a:cs typeface="Calibri" pitchFamily="34" charset="-120"/>
-              </a:rPr>
-              <a:t>CARE</a:t>
-            </a:r>
-            <a:endParaRPr lang="en-US" sz="1000" dirty="0"/>
-          </a:p>
-        </p:txBody>
-      </p:sp>
+      <p:pic>
+        <p:nvPicPr>
+          <p:cNvPr id="14" name="Image 0" descr="preencoded.png">    </p:cNvPr>
+          <p:cNvPicPr>
+            <a:picLocks noChangeAspect="1"/>
+          </p:cNvPicPr>
+          <p:nvPr/>
+        </p:nvPicPr>
+        <p:blipFill>
+          <a:blip r:embed="rId1"/>
+          <a:stretch>
+            <a:fillRect/>
+          </a:stretch>
+        </p:blipFill>
+        <p:spPr>
+          <a:xfrm>
+            <a:off x="822960" y="6199632"/>
+            <a:ext cx="1143000" cy="110642"/>
+          </a:xfrm>
+          <a:prstGeom prst="rect">
+            <a:avLst/>
+          </a:prstGeom>
+        </p:spPr>
+      </p:pic>
     </p:spTree>
   </p:cSld>
   <p:clrMapOvr>
@@ -3562,9 +3552,9 @@
                 <a:solidFill>
                   <a:srgbClr val="101A2E"/>
                 </a:solidFill>
-                <a:latin typeface="Cambria" pitchFamily="34" charset="0"/>
-                <a:ea typeface="Cambria" pitchFamily="34" charset="-122"/>
-                <a:cs typeface="Cambria" pitchFamily="34" charset="-120"/>
+                <a:latin typeface="Arial" pitchFamily="34" charset="0"/>
+                <a:ea typeface="Arial" pitchFamily="34" charset="-122"/>
+                <a:cs typeface="Arial" pitchFamily="34" charset="-120"/>
               </a:rPr>
               <a:t>Konseptet ble formet av en grense</a:t>
             </a:r>
@@ -3628,9 +3618,9 @@
                 <a:solidFill>
                   <a:srgbClr val="4A5568"/>
                 </a:solidFill>
-                <a:latin typeface="Cambria" pitchFamily="34" charset="0"/>
-                <a:ea typeface="Cambria" pitchFamily="34" charset="-122"/>
-                <a:cs typeface="Cambria" pitchFamily="34" charset="-120"/>
+                <a:latin typeface="Arial" pitchFamily="34" charset="0"/>
+                <a:ea typeface="Arial" pitchFamily="34" charset="-122"/>
+                <a:cs typeface="Arial" pitchFamily="34" charset="-120"/>
               </a:rPr>
               <a:t>Først: markedsplass</a:t>
             </a:r>
@@ -3670,9 +3660,9 @@
                 <a:solidFill>
                   <a:srgbClr val="4A5568"/>
                 </a:solidFill>
-                <a:latin typeface="Calibri" pitchFamily="34" charset="0"/>
-                <a:ea typeface="Calibri" pitchFamily="34" charset="-122"/>
-                <a:cs typeface="Calibri" pitchFamily="34" charset="-120"/>
+                <a:latin typeface="Arial" pitchFamily="34" charset="0"/>
+                <a:ea typeface="Arial" pitchFamily="34" charset="-122"/>
+                <a:cs typeface="Arial" pitchFamily="34" charset="-120"/>
               </a:rPr>
               <a:t>Privatpersoner registrerer seg som hjelper. Naviar velger person, setter pris, fordeler oppdrag.</a:t>
             </a:r>
@@ -3707,11 +3697,11 @@
             <a:r>
               <a:rPr lang="en-US" sz="1300" b="1" dirty="0">
                 <a:solidFill>
-                  <a:srgbClr val="A9591C"/>
-                </a:solidFill>
-                <a:latin typeface="Calibri" pitchFamily="34" charset="0"/>
-                <a:ea typeface="Calibri" pitchFamily="34" charset="-122"/>
-                <a:cs typeface="Calibri" pitchFamily="34" charset="-120"/>
+                  <a:srgbClr val="9A6A08"/>
+                </a:solidFill>
+                <a:latin typeface="Arial" pitchFamily="34" charset="0"/>
+                <a:ea typeface="Arial" pitchFamily="34" charset="-122"/>
+                <a:cs typeface="Arial" pitchFamily="34" charset="-120"/>
               </a:rPr>
               <a:t>Forkastet</a:t>
             </a:r>
@@ -3775,9 +3765,9 @@
                 <a:solidFill>
                   <a:srgbClr val="1F6F5C"/>
                 </a:solidFill>
-                <a:latin typeface="Cambria" pitchFamily="34" charset="0"/>
-                <a:ea typeface="Cambria" pitchFamily="34" charset="-122"/>
-                <a:cs typeface="Cambria" pitchFamily="34" charset="-120"/>
+                <a:latin typeface="Arial" pitchFamily="34" charset="0"/>
+                <a:ea typeface="Arial" pitchFamily="34" charset="-122"/>
+                <a:cs typeface="Arial" pitchFamily="34" charset="-120"/>
               </a:rPr>
               <a:t>Nå: programvare til leverandøren</a:t>
             </a:r>
@@ -3817,9 +3807,9 @@
                 <a:solidFill>
                   <a:srgbClr val="101A2E"/>
                 </a:solidFill>
-                <a:latin typeface="Calibri" pitchFamily="34" charset="0"/>
-                <a:ea typeface="Calibri" pitchFamily="34" charset="-122"/>
-                <a:cs typeface="Calibri" pitchFamily="34" charset="-120"/>
+                <a:latin typeface="Arial" pitchFamily="34" charset="0"/>
+                <a:ea typeface="Arial" pitchFamily="34" charset="-122"/>
+                <a:cs typeface="Arial" pitchFamily="34" charset="-120"/>
               </a:rPr>
               <a:t>Leverandøren er arbeidsgiver og legger inn sine egne ansatte. Naviar velger ingen og setter ingen lønn.</a:t>
             </a:r>
@@ -3856,9 +3846,9 @@
                 <a:solidFill>
                   <a:srgbClr val="1F6F5C"/>
                 </a:solidFill>
-                <a:latin typeface="Calibri" pitchFamily="34" charset="0"/>
-                <a:ea typeface="Calibri" pitchFamily="34" charset="-122"/>
-                <a:cs typeface="Calibri" pitchFamily="34" charset="-120"/>
+                <a:latin typeface="Arial" pitchFamily="34" charset="0"/>
+                <a:ea typeface="Arial" pitchFamily="34" charset="-122"/>
+                <a:cs typeface="Arial" pitchFamily="34" charset="-120"/>
               </a:rPr>
               <a:t>I drift som pilot</a:t>
             </a:r>
@@ -3898,9 +3888,9 @@
                 <a:solidFill>
                   <a:srgbClr val="101A2E"/>
                 </a:solidFill>
-                <a:latin typeface="Calibri" pitchFamily="34" charset="0"/>
-                <a:ea typeface="Calibri" pitchFamily="34" charset="-122"/>
-                <a:cs typeface="Calibri" pitchFamily="34" charset="-120"/>
+                <a:latin typeface="Arial" pitchFamily="34" charset="0"/>
+                <a:ea typeface="Arial" pitchFamily="34" charset="-122"/>
+                <a:cs typeface="Arial" pitchFamily="34" charset="-120"/>
               </a:rPr>
               <a:t>«Grunnen er ikke smak.» </a:t>
             </a:r>
@@ -3915,9 +3905,9 @@
                 <a:solidFill>
                   <a:srgbClr val="4A5568"/>
                 </a:solidFill>
-                <a:latin typeface="Calibri" pitchFamily="34" charset="0"/>
-                <a:ea typeface="Calibri" pitchFamily="34" charset="-122"/>
-                <a:cs typeface="Calibri" pitchFamily="34" charset="-120"/>
+                <a:latin typeface="Arial" pitchFamily="34" charset="0"/>
+                <a:ea typeface="Arial" pitchFamily="34" charset="-122"/>
+                <a:cs typeface="Arial" pitchFamily="34" charset="-120"/>
               </a:rPr>
               <a:t>Om noen er arbeidstaker eller oppdragstaker avgjøres av det reelle forholdet, ikke av hva avtalen kalles. En plattform som velger person, setter pris og styrer utførelsen, argumenterer mot seg selv.</a:t>
             </a:r>
@@ -3925,59 +3915,30 @@
           </a:p>
         </p:txBody>
       </p:sp>
-      <p:sp>
-        <p:nvSpPr>
-          <p:cNvPr id="12" name="Text 10"/>
-          <p:cNvSpPr/>
-          <p:nvPr/>
-        </p:nvSpPr>
-        <p:spPr>
-          <a:xfrm>
-            <a:off x="822960" y="6172200"/>
-            <a:ext cx="2743200" cy="274320"/>
-          </a:xfrm>
-          <a:prstGeom prst="rect">
-            <a:avLst/>
-          </a:prstGeom>
-          <a:noFill/>
-          <a:ln/>
-        </p:spPr>
-        <p:txBody>
-          <a:bodyPr wrap="square" lIns="0" tIns="0" rIns="0" bIns="0" rtlCol="0" anchor="t"/>
-          <a:lstStyle/>
-          <a:p>
-            <a:pPr indent="0" marL="0">
-              <a:buNone/>
-            </a:pPr>
-            <a:r>
-              <a:rPr lang="en-US" sz="1000" b="1" spc="200" kern="0" dirty="0">
-                <a:solidFill>
-                  <a:srgbClr val="9AA6BB"/>
-                </a:solidFill>
-                <a:latin typeface="Calibri" pitchFamily="34" charset="0"/>
-                <a:ea typeface="Calibri" pitchFamily="34" charset="-122"/>
-                <a:cs typeface="Calibri" pitchFamily="34" charset="-120"/>
-              </a:rPr>
-              <a:t>NAVIAR </a:t>
-            </a:r>
-            <a:pPr indent="0" marL="0">
-              <a:buNone/>
-            </a:pPr>
-            <a:r>
-              <a:rPr lang="en-US" sz="1000" spc="200" kern="0" dirty="0">
-                <a:solidFill>
-                  <a:srgbClr val="9AA6BB"/>
-                </a:solidFill>
-                <a:latin typeface="Calibri" pitchFamily="34" charset="0"/>
-                <a:ea typeface="Calibri" pitchFamily="34" charset="-122"/>
-                <a:cs typeface="Calibri" pitchFamily="34" charset="-120"/>
-              </a:rPr>
-              <a:t>CARE</a:t>
-            </a:r>
-            <a:endParaRPr lang="en-US" sz="1000" dirty="0"/>
-          </a:p>
-        </p:txBody>
-      </p:sp>
+      <p:pic>
+        <p:nvPicPr>
+          <p:cNvPr id="12" name="Image 0" descr="preencoded.png">    </p:cNvPr>
+          <p:cNvPicPr>
+            <a:picLocks noChangeAspect="1"/>
+          </p:cNvPicPr>
+          <p:nvPr/>
+        </p:nvPicPr>
+        <p:blipFill>
+          <a:blip r:embed="rId1"/>
+          <a:stretch>
+            <a:fillRect/>
+          </a:stretch>
+        </p:blipFill>
+        <p:spPr>
+          <a:xfrm>
+            <a:off x="822960" y="6199632"/>
+            <a:ext cx="1143000" cy="110642"/>
+          </a:xfrm>
+          <a:prstGeom prst="rect">
+            <a:avLst/>
+          </a:prstGeom>
+        </p:spPr>
+      </p:pic>
     </p:spTree>
   </p:cSld>
   <p:clrMapOvr>
@@ -4039,9 +4000,9 @@
                 <a:solidFill>
                   <a:srgbClr val="101A2E"/>
                 </a:solidFill>
-                <a:latin typeface="Cambria" pitchFamily="34" charset="0"/>
-                <a:ea typeface="Cambria" pitchFamily="34" charset="-122"/>
-                <a:cs typeface="Cambria" pitchFamily="34" charset="-120"/>
+                <a:latin typeface="Arial" pitchFamily="34" charset="0"/>
+                <a:ea typeface="Arial" pitchFamily="34" charset="-122"/>
+                <a:cs typeface="Arial" pitchFamily="34" charset="-120"/>
               </a:rPr>
               <a:t>Tre mennesker, tre ulike dører</a:t>
             </a:r>
@@ -4078,9 +4039,9 @@
                 <a:solidFill>
                   <a:srgbClr val="4A5568"/>
                 </a:solidFill>
-                <a:latin typeface="Calibri" pitchFamily="34" charset="0"/>
-                <a:ea typeface="Calibri" pitchFamily="34" charset="-122"/>
-                <a:cs typeface="Calibri" pitchFamily="34" charset="-120"/>
+                <a:latin typeface="Arial" pitchFamily="34" charset="0"/>
+                <a:ea typeface="Arial" pitchFamily="34" charset="-122"/>
+                <a:cs typeface="Arial" pitchFamily="34" charset="-120"/>
               </a:rPr>
               <a:t>Den enkeltbeslutningen som er lettest å rive ned uten å merke det.</a:t>
             </a:r>
@@ -4137,9 +4098,9 @@
                 <a:solidFill>
                   <a:srgbClr val="1F6F5C"/>
                 </a:solidFill>
-                <a:latin typeface="Cambria" pitchFamily="34" charset="0"/>
-                <a:ea typeface="Cambria" pitchFamily="34" charset="-122"/>
-                <a:cs typeface="Cambria" pitchFamily="34" charset="-120"/>
+                <a:latin typeface="Arial" pitchFamily="34" charset="0"/>
+                <a:ea typeface="Arial" pitchFamily="34" charset="-122"/>
+                <a:cs typeface="Arial" pitchFamily="34" charset="-120"/>
               </a:rPr>
               <a:t>1</a:t>
             </a:r>
@@ -4176,9 +4137,9 @@
                 <a:solidFill>
                   <a:srgbClr val="101A2E"/>
                 </a:solidFill>
-                <a:latin typeface="Cambria" pitchFamily="34" charset="0"/>
-                <a:ea typeface="Cambria" pitchFamily="34" charset="-122"/>
-                <a:cs typeface="Cambria" pitchFamily="34" charset="-120"/>
+                <a:latin typeface="Arial" pitchFamily="34" charset="0"/>
+                <a:ea typeface="Arial" pitchFamily="34" charset="-122"/>
+                <a:cs typeface="Arial" pitchFamily="34" charset="-120"/>
               </a:rPr>
               <a:t>Kontoret</a:t>
             </a:r>
@@ -4215,9 +4176,9 @@
                 <a:solidFill>
                   <a:srgbClr val="1F6F5C"/>
                 </a:solidFill>
-                <a:latin typeface="Calibri" pitchFamily="34" charset="0"/>
-                <a:ea typeface="Calibri" pitchFamily="34" charset="-122"/>
-                <a:cs typeface="Calibri" pitchFamily="34" charset="-120"/>
+                <a:latin typeface="Arial" pitchFamily="34" charset="0"/>
+                <a:ea typeface="Arial" pitchFamily="34" charset="-122"/>
+                <a:cs typeface="Arial" pitchFamily="34" charset="-120"/>
               </a:rPr>
               <a:t>E-postinnlogging</a:t>
             </a:r>
@@ -4257,9 +4218,9 @@
                 <a:solidFill>
                   <a:srgbClr val="4A5568"/>
                 </a:solidFill>
-                <a:latin typeface="Calibri" pitchFamily="34" charset="0"/>
-                <a:ea typeface="Calibri" pitchFamily="34" charset="-122"/>
-                <a:cs typeface="Calibri" pitchFamily="34" charset="-120"/>
+                <a:latin typeface="Arial" pitchFamily="34" charset="0"/>
+                <a:ea typeface="Arial" pitchFamily="34" charset="-122"/>
+                <a:cs typeface="Arial" pitchFamily="34" charset="-120"/>
               </a:rPr>
               <a:t>Én konto, én arbeidsdag, mange besøk</a:t>
             </a:r>
@@ -4316,9 +4277,9 @@
                 <a:solidFill>
                   <a:srgbClr val="1F6F5C"/>
                 </a:solidFill>
-                <a:latin typeface="Cambria" pitchFamily="34" charset="0"/>
-                <a:ea typeface="Cambria" pitchFamily="34" charset="-122"/>
-                <a:cs typeface="Cambria" pitchFamily="34" charset="-120"/>
+                <a:latin typeface="Arial" pitchFamily="34" charset="0"/>
+                <a:ea typeface="Arial" pitchFamily="34" charset="-122"/>
+                <a:cs typeface="Arial" pitchFamily="34" charset="-120"/>
               </a:rPr>
               <a:t>2</a:t>
             </a:r>
@@ -4355,9 +4316,9 @@
                 <a:solidFill>
                   <a:srgbClr val="101A2E"/>
                 </a:solidFill>
-                <a:latin typeface="Cambria" pitchFamily="34" charset="0"/>
-                <a:ea typeface="Cambria" pitchFamily="34" charset="-122"/>
-                <a:cs typeface="Cambria" pitchFamily="34" charset="-120"/>
+                <a:latin typeface="Arial" pitchFamily="34" charset="0"/>
+                <a:ea typeface="Arial" pitchFamily="34" charset="-122"/>
+                <a:cs typeface="Arial" pitchFamily="34" charset="-120"/>
               </a:rPr>
               <a:t>Hjelperen som søker</a:t>
             </a:r>
@@ -4394,9 +4355,9 @@
                 <a:solidFill>
                   <a:srgbClr val="1F6F5C"/>
                 </a:solidFill>
-                <a:latin typeface="Calibri" pitchFamily="34" charset="0"/>
-                <a:ea typeface="Calibri" pitchFamily="34" charset="-122"/>
-                <a:cs typeface="Calibri" pitchFamily="34" charset="-120"/>
+                <a:latin typeface="Arial" pitchFamily="34" charset="0"/>
+                <a:ea typeface="Arial" pitchFamily="34" charset="-122"/>
+                <a:cs typeface="Arial" pitchFamily="34" charset="-120"/>
               </a:rPr>
               <a:t>Telefon + engangskode</a:t>
             </a:r>
@@ -4436,9 +4397,9 @@
                 <a:solidFill>
                   <a:srgbClr val="4A5568"/>
                 </a:solidFill>
-                <a:latin typeface="Calibri" pitchFamily="34" charset="0"/>
-                <a:ea typeface="Calibri" pitchFamily="34" charset="-122"/>
-                <a:cs typeface="Calibri" pitchFamily="34" charset="-120"/>
+                <a:latin typeface="Arial" pitchFamily="34" charset="0"/>
+                <a:ea typeface="Arial" pitchFamily="34" charset="-122"/>
+                <a:cs typeface="Arial" pitchFamily="34" charset="-120"/>
               </a:rPr>
               <a:t>Bekrefter at nummeret er hennes. Én gang</a:t>
             </a:r>
@@ -4493,11 +4454,11 @@
             <a:r>
               <a:rPr lang="en-US" sz="2000" b="1" dirty="0">
                 <a:solidFill>
-                  <a:srgbClr val="A9591C"/>
-                </a:solidFill>
-                <a:latin typeface="Cambria" pitchFamily="34" charset="0"/>
-                <a:ea typeface="Cambria" pitchFamily="34" charset="-122"/>
-                <a:cs typeface="Cambria" pitchFamily="34" charset="-120"/>
+                  <a:srgbClr val="9A6A08"/>
+                </a:solidFill>
+                <a:latin typeface="Arial" pitchFamily="34" charset="0"/>
+                <a:ea typeface="Arial" pitchFamily="34" charset="-122"/>
+                <a:cs typeface="Arial" pitchFamily="34" charset="-120"/>
               </a:rPr>
               <a:t>3</a:t>
             </a:r>
@@ -4534,9 +4495,9 @@
                 <a:solidFill>
                   <a:srgbClr val="101A2E"/>
                 </a:solidFill>
-                <a:latin typeface="Cambria" pitchFamily="34" charset="0"/>
-                <a:ea typeface="Cambria" pitchFamily="34" charset="-122"/>
-                <a:cs typeface="Cambria" pitchFamily="34" charset="-120"/>
+                <a:latin typeface="Arial" pitchFamily="34" charset="0"/>
+                <a:ea typeface="Arial" pitchFamily="34" charset="-122"/>
+                <a:cs typeface="Arial" pitchFamily="34" charset="-120"/>
               </a:rPr>
               <a:t>Arbeideren på oppdrag</a:t>
             </a:r>
@@ -4571,11 +4532,11 @@
             <a:r>
               <a:rPr lang="en-US" sz="1400" b="1" dirty="0">
                 <a:solidFill>
-                  <a:srgbClr val="A9591C"/>
-                </a:solidFill>
-                <a:latin typeface="Calibri" pitchFamily="34" charset="0"/>
-                <a:ea typeface="Calibri" pitchFamily="34" charset="-122"/>
-                <a:cs typeface="Calibri" pitchFamily="34" charset="-120"/>
+                  <a:srgbClr val="9A6A08"/>
+                </a:solidFill>
+                <a:latin typeface="Arial" pitchFamily="34" charset="0"/>
+                <a:ea typeface="Arial" pitchFamily="34" charset="-122"/>
+                <a:cs typeface="Arial" pitchFamily="34" charset="-120"/>
               </a:rPr>
               <a:t>Lenke per besøk. Ingen konto</a:t>
             </a:r>
@@ -4615,9 +4576,9 @@
                 <a:solidFill>
                   <a:srgbClr val="4A5568"/>
                 </a:solidFill>
-                <a:latin typeface="Calibri" pitchFamily="34" charset="0"/>
-                <a:ea typeface="Calibri" pitchFamily="34" charset="-122"/>
-                <a:cs typeface="Calibri" pitchFamily="34" charset="-120"/>
+                <a:latin typeface="Arial" pitchFamily="34" charset="0"/>
+                <a:ea typeface="Arial" pitchFamily="34" charset="-122"/>
+                <a:cs typeface="Arial" pitchFamily="34" charset="-120"/>
               </a:rPr>
               <a:t>Tilgang til ett besøk, ikke til et forhold</a:t>
             </a:r>
@@ -4654,9 +4615,9 @@
                 <a:solidFill>
                   <a:srgbClr val="4A5568"/>
                 </a:solidFill>
-                <a:latin typeface="Calibri" pitchFamily="34" charset="0"/>
-                <a:ea typeface="Calibri" pitchFamily="34" charset="-122"/>
-                <a:cs typeface="Calibri" pitchFamily="34" charset="-120"/>
+                <a:latin typeface="Arial" pitchFamily="34" charset="0"/>
+                <a:ea typeface="Arial" pitchFamily="34" charset="-122"/>
+                <a:cs typeface="Arial" pitchFamily="34" charset="-120"/>
               </a:rPr>
               <a:t>Arbeiderlenken dør etter tolv timer. Gir vi henne en konto, blir tilgangen varig, og et oppdrag blir en relasjon systemet må vedlikeholde.</a:t>
             </a:r>
@@ -4664,59 +4625,30 @@
           </a:p>
         </p:txBody>
       </p:sp>
-      <p:sp>
-        <p:nvSpPr>
-          <p:cNvPr id="20" name="Text 18"/>
-          <p:cNvSpPr/>
-          <p:nvPr/>
-        </p:nvSpPr>
-        <p:spPr>
-          <a:xfrm>
-            <a:off x="822960" y="6172200"/>
-            <a:ext cx="2743200" cy="274320"/>
-          </a:xfrm>
-          <a:prstGeom prst="rect">
-            <a:avLst/>
-          </a:prstGeom>
-          <a:noFill/>
-          <a:ln/>
-        </p:spPr>
-        <p:txBody>
-          <a:bodyPr wrap="square" lIns="0" tIns="0" rIns="0" bIns="0" rtlCol="0" anchor="t"/>
-          <a:lstStyle/>
-          <a:p>
-            <a:pPr indent="0" marL="0">
-              <a:buNone/>
-            </a:pPr>
-            <a:r>
-              <a:rPr lang="en-US" sz="1000" b="1" spc="200" kern="0" dirty="0">
-                <a:solidFill>
-                  <a:srgbClr val="9AA6BB"/>
-                </a:solidFill>
-                <a:latin typeface="Calibri" pitchFamily="34" charset="0"/>
-                <a:ea typeface="Calibri" pitchFamily="34" charset="-122"/>
-                <a:cs typeface="Calibri" pitchFamily="34" charset="-120"/>
-              </a:rPr>
-              <a:t>NAVIAR </a:t>
-            </a:r>
-            <a:pPr indent="0" marL="0">
-              <a:buNone/>
-            </a:pPr>
-            <a:r>
-              <a:rPr lang="en-US" sz="1000" spc="200" kern="0" dirty="0">
-                <a:solidFill>
-                  <a:srgbClr val="9AA6BB"/>
-                </a:solidFill>
-                <a:latin typeface="Calibri" pitchFamily="34" charset="0"/>
-                <a:ea typeface="Calibri" pitchFamily="34" charset="-122"/>
-                <a:cs typeface="Calibri" pitchFamily="34" charset="-120"/>
-              </a:rPr>
-              <a:t>CARE</a:t>
-            </a:r>
-            <a:endParaRPr lang="en-US" sz="1000" dirty="0"/>
-          </a:p>
-        </p:txBody>
-      </p:sp>
+      <p:pic>
+        <p:nvPicPr>
+          <p:cNvPr id="20" name="Image 0" descr="preencoded.png">    </p:cNvPr>
+          <p:cNvPicPr>
+            <a:picLocks noChangeAspect="1"/>
+          </p:cNvPicPr>
+          <p:nvPr/>
+        </p:nvPicPr>
+        <p:blipFill>
+          <a:blip r:embed="rId1"/>
+          <a:stretch>
+            <a:fillRect/>
+          </a:stretch>
+        </p:blipFill>
+        <p:spPr>
+          <a:xfrm>
+            <a:off x="822960" y="6199632"/>
+            <a:ext cx="1143000" cy="110642"/>
+          </a:xfrm>
+          <a:prstGeom prst="rect">
+            <a:avLst/>
+          </a:prstGeom>
+        </p:spPr>
+      </p:pic>
     </p:spTree>
   </p:cSld>
   <p:clrMapOvr>
@@ -4778,9 +4710,9 @@
                 <a:solidFill>
                   <a:srgbClr val="101A2E"/>
                 </a:solidFill>
-                <a:latin typeface="Cambria" pitchFamily="34" charset="0"/>
-                <a:ea typeface="Cambria" pitchFamily="34" charset="-122"/>
-                <a:cs typeface="Cambria" pitchFamily="34" charset="-120"/>
+                <a:latin typeface="Arial" pitchFamily="34" charset="0"/>
+                <a:ea typeface="Arial" pitchFamily="34" charset="-122"/>
+                <a:cs typeface="Arial" pitchFamily="34" charset="-120"/>
               </a:rPr>
               <a:t>Fire ting bygges aldri</a:t>
             </a:r>
@@ -4817,9 +4749,9 @@
                 <a:solidFill>
                   <a:srgbClr val="4A5568"/>
                 </a:solidFill>
-                <a:latin typeface="Calibri" pitchFamily="34" charset="0"/>
-                <a:ea typeface="Calibri" pitchFamily="34" charset="-122"/>
-                <a:cs typeface="Calibri" pitchFamily="34" charset="-120"/>
+                <a:latin typeface="Arial" pitchFamily="34" charset="0"/>
+                <a:ea typeface="Arial" pitchFamily="34" charset="-122"/>
+                <a:cs typeface="Arial" pitchFamily="34" charset="-120"/>
               </a:rPr>
               <a:t>Uansett hvordan de blir bedt om.</a:t>
             </a:r>
@@ -4848,7 +4780,7 @@
           </a:solidFill>
           <a:ln w="12700">
             <a:solidFill>
-              <a:srgbClr val="E4DCCF"/>
+              <a:srgbClr val="DDE2EA"/>
             </a:solidFill>
             <a:prstDash val="solid"/>
           </a:ln>
@@ -4881,11 +4813,11 @@
             <a:r>
               <a:rPr lang="en-US" sz="1800" b="1" dirty="0">
                 <a:solidFill>
-                  <a:srgbClr val="A9591C"/>
-                </a:solidFill>
-                <a:latin typeface="Cambria" pitchFamily="34" charset="0"/>
-                <a:ea typeface="Cambria" pitchFamily="34" charset="-122"/>
-                <a:cs typeface="Cambria" pitchFamily="34" charset="-120"/>
+                  <a:srgbClr val="9A6A08"/>
+                </a:solidFill>
+                <a:latin typeface="Arial" pitchFamily="34" charset="0"/>
+                <a:ea typeface="Arial" pitchFamily="34" charset="-122"/>
+                <a:cs typeface="Arial" pitchFamily="34" charset="-120"/>
               </a:rPr>
               <a:t>Helsehjelp</a:t>
             </a:r>
@@ -4925,9 +4857,9 @@
                 <a:solidFill>
                   <a:srgbClr val="4A5568"/>
                 </a:solidFill>
-                <a:latin typeface="Calibri" pitchFamily="34" charset="0"/>
-                <a:ea typeface="Calibri" pitchFamily="34" charset="-122"/>
-                <a:cs typeface="Calibri" pitchFamily="34" charset="-120"/>
+                <a:latin typeface="Arial" pitchFamily="34" charset="0"/>
+                <a:ea typeface="Arial" pitchFamily="34" charset="-122"/>
+                <a:cs typeface="Arial" pitchFamily="34" charset="-120"/>
               </a:rPr>
               <a:t>Medisinering, stell, sårbehandling, vurdering av helsetilstand</a:t>
             </a:r>
@@ -4956,7 +4888,7 @@
           </a:solidFill>
           <a:ln w="12700">
             <a:solidFill>
-              <a:srgbClr val="E4DCCF"/>
+              <a:srgbClr val="DDE2EA"/>
             </a:solidFill>
             <a:prstDash val="solid"/>
           </a:ln>
@@ -4989,11 +4921,11 @@
             <a:r>
               <a:rPr lang="en-US" sz="1800" b="1" dirty="0">
                 <a:solidFill>
-                  <a:srgbClr val="A9591C"/>
-                </a:solidFill>
-                <a:latin typeface="Cambria" pitchFamily="34" charset="0"/>
-                <a:ea typeface="Cambria" pitchFamily="34" charset="-122"/>
-                <a:cs typeface="Cambria" pitchFamily="34" charset="-120"/>
+                  <a:srgbClr val="9A6A08"/>
+                </a:solidFill>
+                <a:latin typeface="Arial" pitchFamily="34" charset="0"/>
+                <a:ea typeface="Arial" pitchFamily="34" charset="-122"/>
+                <a:cs typeface="Arial" pitchFamily="34" charset="-120"/>
               </a:rPr>
               <a:t>Penger</a:t>
             </a:r>
@@ -5033,9 +4965,9 @@
                 <a:solidFill>
                   <a:srgbClr val="4A5568"/>
                 </a:solidFill>
-                <a:latin typeface="Calibri" pitchFamily="34" charset="0"/>
-                <a:ea typeface="Calibri" pitchFamily="34" charset="-122"/>
-                <a:cs typeface="Calibri" pitchFamily="34" charset="-120"/>
+                <a:latin typeface="Arial" pitchFamily="34" charset="0"/>
+                <a:ea typeface="Arial" pitchFamily="34" charset="-122"/>
+                <a:cs typeface="Arial" pitchFamily="34" charset="-120"/>
               </a:rPr>
               <a:t>PIN, BankID, kontonummer eller verdisaker</a:t>
             </a:r>
@@ -5064,7 +4996,7 @@
           </a:solidFill>
           <a:ln w="12700">
             <a:solidFill>
-              <a:srgbClr val="E4DCCF"/>
+              <a:srgbClr val="DDE2EA"/>
             </a:solidFill>
             <a:prstDash val="solid"/>
           </a:ln>
@@ -5097,11 +5029,11 @@
             <a:r>
               <a:rPr lang="en-US" sz="1800" b="1" dirty="0">
                 <a:solidFill>
-                  <a:srgbClr val="A9591C"/>
-                </a:solidFill>
-                <a:latin typeface="Cambria" pitchFamily="34" charset="0"/>
-                <a:ea typeface="Cambria" pitchFamily="34" charset="-122"/>
-                <a:cs typeface="Cambria" pitchFamily="34" charset="-120"/>
+                  <a:srgbClr val="9A6A08"/>
+                </a:solidFill>
+                <a:latin typeface="Arial" pitchFamily="34" charset="0"/>
+                <a:ea typeface="Arial" pitchFamily="34" charset="-122"/>
+                <a:cs typeface="Arial" pitchFamily="34" charset="-120"/>
               </a:rPr>
               <a:t>Overvåking</a:t>
             </a:r>
@@ -5141,9 +5073,9 @@
                 <a:solidFill>
                   <a:srgbClr val="4A5568"/>
                 </a:solidFill>
-                <a:latin typeface="Calibri" pitchFamily="34" charset="0"/>
-                <a:ea typeface="Calibri" pitchFamily="34" charset="-122"/>
-                <a:cs typeface="Calibri" pitchFamily="34" charset="-120"/>
+                <a:latin typeface="Arial" pitchFamily="34" charset="0"/>
+                <a:ea typeface="Arial" pitchFamily="34" charset="-122"/>
+                <a:cs typeface="Arial" pitchFamily="34" charset="-120"/>
               </a:rPr>
               <a:t>Løpende posisjon, bilder fra hjemmet, lydopptak</a:t>
             </a:r>
@@ -5172,7 +5104,7 @@
           </a:solidFill>
           <a:ln w="12700">
             <a:solidFill>
-              <a:srgbClr val="E4DCCF"/>
+              <a:srgbClr val="DDE2EA"/>
             </a:solidFill>
             <a:prstDash val="solid"/>
           </a:ln>
@@ -5205,11 +5137,11 @@
             <a:r>
               <a:rPr lang="en-US" sz="1800" b="1" dirty="0">
                 <a:solidFill>
-                  <a:srgbClr val="A9591C"/>
-                </a:solidFill>
-                <a:latin typeface="Cambria" pitchFamily="34" charset="0"/>
-                <a:ea typeface="Cambria" pitchFamily="34" charset="-122"/>
-                <a:cs typeface="Cambria" pitchFamily="34" charset="-120"/>
+                  <a:srgbClr val="9A6A08"/>
+                </a:solidFill>
+                <a:latin typeface="Arial" pitchFamily="34" charset="0"/>
+                <a:ea typeface="Arial" pitchFamily="34" charset="-122"/>
+                <a:cs typeface="Arial" pitchFamily="34" charset="-120"/>
               </a:rPr>
               <a:t>Automatikk uten menneske</a:t>
             </a:r>
@@ -5249,9 +5181,9 @@
                 <a:solidFill>
                   <a:srgbClr val="4A5568"/>
                 </a:solidFill>
-                <a:latin typeface="Calibri" pitchFamily="34" charset="0"/>
-                <a:ea typeface="Calibri" pitchFamily="34" charset="-122"/>
-                <a:cs typeface="Calibri" pitchFamily="34" charset="-120"/>
+                <a:latin typeface="Arial" pitchFamily="34" charset="0"/>
+                <a:ea typeface="Arial" pitchFamily="34" charset="-122"/>
+                <a:cs typeface="Arial" pitchFamily="34" charset="-120"/>
               </a:rPr>
               <a:t>Avgjørelser med store følger som ingen ser på</a:t>
             </a:r>
@@ -5288,9 +5220,9 @@
                 <a:solidFill>
                   <a:srgbClr val="101A2E"/>
                 </a:solidFill>
-                <a:latin typeface="Cambria" pitchFamily="34" charset="0"/>
-                <a:ea typeface="Cambria" pitchFamily="34" charset="-122"/>
-                <a:cs typeface="Cambria" pitchFamily="34" charset="-120"/>
+                <a:latin typeface="Arial" pitchFamily="34" charset="0"/>
+                <a:ea typeface="Arial" pitchFamily="34" charset="-122"/>
+                <a:cs typeface="Arial" pitchFamily="34" charset="-120"/>
               </a:rPr>
               <a:t>Et flagg er en policy. Fravær av kode er en grense.</a:t>
             </a:r>
@@ -5298,59 +5230,30 @@
           </a:p>
         </p:txBody>
       </p:sp>
-      <p:sp>
-        <p:nvSpPr>
-          <p:cNvPr id="17" name="Text 15"/>
-          <p:cNvSpPr/>
-          <p:nvPr/>
-        </p:nvSpPr>
-        <p:spPr>
-          <a:xfrm>
-            <a:off x="822960" y="6172200"/>
-            <a:ext cx="2743200" cy="274320"/>
-          </a:xfrm>
-          <a:prstGeom prst="rect">
-            <a:avLst/>
-          </a:prstGeom>
-          <a:noFill/>
-          <a:ln/>
-        </p:spPr>
-        <p:txBody>
-          <a:bodyPr wrap="square" lIns="0" tIns="0" rIns="0" bIns="0" rtlCol="0" anchor="t"/>
-          <a:lstStyle/>
-          <a:p>
-            <a:pPr indent="0" marL="0">
-              <a:buNone/>
-            </a:pPr>
-            <a:r>
-              <a:rPr lang="en-US" sz="1000" b="1" spc="200" kern="0" dirty="0">
-                <a:solidFill>
-                  <a:srgbClr val="9AA6BB"/>
-                </a:solidFill>
-                <a:latin typeface="Calibri" pitchFamily="34" charset="0"/>
-                <a:ea typeface="Calibri" pitchFamily="34" charset="-122"/>
-                <a:cs typeface="Calibri" pitchFamily="34" charset="-120"/>
-              </a:rPr>
-              <a:t>NAVIAR </a:t>
-            </a:r>
-            <a:pPr indent="0" marL="0">
-              <a:buNone/>
-            </a:pPr>
-            <a:r>
-              <a:rPr lang="en-US" sz="1000" spc="200" kern="0" dirty="0">
-                <a:solidFill>
-                  <a:srgbClr val="9AA6BB"/>
-                </a:solidFill>
-                <a:latin typeface="Calibri" pitchFamily="34" charset="0"/>
-                <a:ea typeface="Calibri" pitchFamily="34" charset="-122"/>
-                <a:cs typeface="Calibri" pitchFamily="34" charset="-120"/>
-              </a:rPr>
-              <a:t>CARE</a:t>
-            </a:r>
-            <a:endParaRPr lang="en-US" sz="1000" dirty="0"/>
-          </a:p>
-        </p:txBody>
-      </p:sp>
+      <p:pic>
+        <p:nvPicPr>
+          <p:cNvPr id="17" name="Image 0" descr="preencoded.png">    </p:cNvPr>
+          <p:cNvPicPr>
+            <a:picLocks noChangeAspect="1"/>
+          </p:cNvPicPr>
+          <p:nvPr/>
+        </p:nvPicPr>
+        <p:blipFill>
+          <a:blip r:embed="rId1"/>
+          <a:stretch>
+            <a:fillRect/>
+          </a:stretch>
+        </p:blipFill>
+        <p:spPr>
+          <a:xfrm>
+            <a:off x="822960" y="6199632"/>
+            <a:ext cx="1143000" cy="110642"/>
+          </a:xfrm>
+          <a:prstGeom prst="rect">
+            <a:avLst/>
+          </a:prstGeom>
+        </p:spPr>
+      </p:pic>
     </p:spTree>
   </p:cSld>
   <p:clrMapOvr>
@@ -5412,9 +5315,9 @@
                 <a:solidFill>
                   <a:srgbClr val="101A2E"/>
                 </a:solidFill>
-                <a:latin typeface="Cambria" pitchFamily="34" charset="0"/>
-                <a:ea typeface="Cambria" pitchFamily="34" charset="-122"/>
-                <a:cs typeface="Cambria" pitchFamily="34" charset="-120"/>
+                <a:latin typeface="Arial" pitchFamily="34" charset="0"/>
+                <a:ea typeface="Arial" pitchFamily="34" charset="-122"/>
+                <a:cs typeface="Arial" pitchFamily="34" charset="-120"/>
               </a:rPr>
               <a:t>Opplysningene faller bort i fire trinn</a:t>
             </a:r>
@@ -5451,9 +5354,9 @@
                 <a:solidFill>
                   <a:srgbClr val="4A5568"/>
                 </a:solidFill>
-                <a:latin typeface="Calibri" pitchFamily="34" charset="0"/>
-                <a:ea typeface="Calibri" pitchFamily="34" charset="-122"/>
-                <a:cs typeface="Calibri" pitchFamily="34" charset="-120"/>
+                <a:latin typeface="Arial" pitchFamily="34" charset="0"/>
+                <a:ea typeface="Arial" pitchFamily="34" charset="-122"/>
+                <a:cs typeface="Arial" pitchFamily="34" charset="-120"/>
               </a:rPr>
               <a:t>Slettingen kjører ved hver lesning, ikke som en nattjobb. En sletterutine som ikke kjører, er ikke en sletterutine.</a:t>
             </a:r>
@@ -5490,9 +5393,9 @@
                 <a:solidFill>
                   <a:srgbClr val="1F6F5C"/>
                 </a:solidFill>
-                <a:latin typeface="Calibri" pitchFamily="34" charset="0"/>
-                <a:ea typeface="Calibri" pitchFamily="34" charset="-122"/>
-                <a:cs typeface="Calibri" pitchFamily="34" charset="-120"/>
+                <a:latin typeface="Arial" pitchFamily="34" charset="0"/>
+                <a:ea typeface="Arial" pitchFamily="34" charset="-122"/>
+                <a:cs typeface="Arial" pitchFamily="34" charset="-120"/>
               </a:rPr>
               <a:t>12 timer</a:t>
             </a:r>
@@ -5572,9 +5475,9 @@
                 <a:solidFill>
                   <a:srgbClr val="101A2E"/>
                 </a:solidFill>
-                <a:latin typeface="Cambria" pitchFamily="34" charset="0"/>
-                <a:ea typeface="Cambria" pitchFamily="34" charset="-122"/>
-                <a:cs typeface="Cambria" pitchFamily="34" charset="-120"/>
+                <a:latin typeface="Arial" pitchFamily="34" charset="0"/>
+                <a:ea typeface="Arial" pitchFamily="34" charset="-122"/>
+                <a:cs typeface="Arial" pitchFamily="34" charset="-120"/>
               </a:rPr>
               <a:t>Arbeiderlenken</a:t>
             </a:r>
@@ -5650,9 +5553,9 @@
                 <a:solidFill>
                   <a:srgbClr val="1F6F5C"/>
                 </a:solidFill>
-                <a:latin typeface="Calibri" pitchFamily="34" charset="0"/>
-                <a:ea typeface="Calibri" pitchFamily="34" charset="-122"/>
-                <a:cs typeface="Calibri" pitchFamily="34" charset="-120"/>
+                <a:latin typeface="Arial" pitchFamily="34" charset="0"/>
+                <a:ea typeface="Arial" pitchFamily="34" charset="-122"/>
+                <a:cs typeface="Arial" pitchFamily="34" charset="-120"/>
               </a:rPr>
               <a:t>7 dager</a:t>
             </a:r>
@@ -5732,9 +5635,9 @@
                 <a:solidFill>
                   <a:srgbClr val="101A2E"/>
                 </a:solidFill>
-                <a:latin typeface="Cambria" pitchFamily="34" charset="0"/>
-                <a:ea typeface="Cambria" pitchFamily="34" charset="-122"/>
-                <a:cs typeface="Cambria" pitchFamily="34" charset="-120"/>
+                <a:latin typeface="Arial" pitchFamily="34" charset="0"/>
+                <a:ea typeface="Arial" pitchFamily="34" charset="-122"/>
+                <a:cs typeface="Arial" pitchFamily="34" charset="-120"/>
               </a:rPr>
               <a:t>Friteksten</a:t>
             </a:r>
@@ -5810,9 +5713,9 @@
                 <a:solidFill>
                   <a:srgbClr val="1F6F5C"/>
                 </a:solidFill>
-                <a:latin typeface="Calibri" pitchFamily="34" charset="0"/>
-                <a:ea typeface="Calibri" pitchFamily="34" charset="-122"/>
-                <a:cs typeface="Calibri" pitchFamily="34" charset="-120"/>
+                <a:latin typeface="Arial" pitchFamily="34" charset="0"/>
+                <a:ea typeface="Arial" pitchFamily="34" charset="-122"/>
+                <a:cs typeface="Arial" pitchFamily="34" charset="-120"/>
               </a:rPr>
               <a:t>30 dager</a:t>
             </a:r>
@@ -5892,9 +5795,9 @@
                 <a:solidFill>
                   <a:srgbClr val="101A2E"/>
                 </a:solidFill>
-                <a:latin typeface="Cambria" pitchFamily="34" charset="0"/>
-                <a:ea typeface="Cambria" pitchFamily="34" charset="-122"/>
-                <a:cs typeface="Cambria" pitchFamily="34" charset="-120"/>
+                <a:latin typeface="Arial" pitchFamily="34" charset="0"/>
+                <a:ea typeface="Arial" pitchFamily="34" charset="-122"/>
+                <a:cs typeface="Arial" pitchFamily="34" charset="-120"/>
               </a:rPr>
               <a:t>Navn og kontaktpunkt</a:t>
             </a:r>
@@ -5970,9 +5873,9 @@
                 <a:solidFill>
                   <a:srgbClr val="1F6F5C"/>
                 </a:solidFill>
-                <a:latin typeface="Calibri" pitchFamily="34" charset="0"/>
-                <a:ea typeface="Calibri" pitchFamily="34" charset="-122"/>
-                <a:cs typeface="Calibri" pitchFamily="34" charset="-120"/>
+                <a:latin typeface="Arial" pitchFamily="34" charset="0"/>
+                <a:ea typeface="Arial" pitchFamily="34" charset="-122"/>
+                <a:cs typeface="Arial" pitchFamily="34" charset="-120"/>
               </a:rPr>
               <a:t>1 år</a:t>
             </a:r>
@@ -6029,9 +5932,9 @@
                 <a:solidFill>
                   <a:srgbClr val="101A2E"/>
                 </a:solidFill>
-                <a:latin typeface="Cambria" pitchFamily="34" charset="0"/>
-                <a:ea typeface="Cambria" pitchFamily="34" charset="-122"/>
-                <a:cs typeface="Cambria" pitchFamily="34" charset="-120"/>
+                <a:latin typeface="Arial" pitchFamily="34" charset="0"/>
+                <a:ea typeface="Arial" pitchFamily="34" charset="-122"/>
+                <a:cs typeface="Arial" pitchFamily="34" charset="-120"/>
               </a:rPr>
               <a:t>Resten</a:t>
             </a:r>
@@ -6086,7 +5989,7 @@
         </p:nvSpPr>
         <p:spPr>
           <a:xfrm>
-            <a:off x="822960" y="5486400"/>
+            <a:off x="822960" y="5303520"/>
             <a:ext cx="10515600" cy="658368"/>
           </a:xfrm>
           <a:prstGeom prst="roundRect">
@@ -6108,7 +6011,7 @@
         </p:nvSpPr>
         <p:spPr>
           <a:xfrm>
-            <a:off x="1143000" y="5486400"/>
+            <a:off x="1143000" y="5303520"/>
             <a:ext cx="1920240" cy="658368"/>
           </a:xfrm>
           <a:prstGeom prst="rect">
@@ -6127,11 +6030,11 @@
             <a:r>
               <a:rPr lang="en-US" sz="1100" spc="150" kern="0" dirty="0">
                 <a:solidFill>
-                  <a:srgbClr val="9AA6BB"/>
-                </a:solidFill>
-                <a:latin typeface="Calibri" pitchFamily="34" charset="0"/>
-                <a:ea typeface="Calibri" pitchFamily="34" charset="-122"/>
-                <a:cs typeface="Calibri" pitchFamily="34" charset="-120"/>
+                  <a:srgbClr val="FBF6EE"/>
+                </a:solidFill>
+                <a:latin typeface="Arial" pitchFamily="34" charset="0"/>
+                <a:ea typeface="Arial" pitchFamily="34" charset="-122"/>
+                <a:cs typeface="Arial" pitchFamily="34" charset="-120"/>
               </a:rPr>
               <a:t>DET SOM STÅR IGJEN</a:t>
             </a:r>
@@ -6147,7 +6050,7 @@
         </p:nvSpPr>
         <p:spPr>
           <a:xfrm>
-            <a:off x="3429000" y="5486400"/>
+            <a:off x="3429000" y="5303520"/>
             <a:ext cx="7589520" cy="658368"/>
           </a:xfrm>
           <a:prstGeom prst="rect">
@@ -6168,9 +6071,9 @@
                 <a:solidFill>
                   <a:srgbClr val="FFFFFF"/>
                 </a:solidFill>
-                <a:latin typeface="Calibri" pitchFamily="34" charset="0"/>
-                <a:ea typeface="Calibri" pitchFamily="34" charset="-122"/>
-                <a:cs typeface="Calibri" pitchFamily="34" charset="-120"/>
+                <a:latin typeface="Arial" pitchFamily="34" charset="0"/>
+                <a:ea typeface="Arial" pitchFamily="34" charset="-122"/>
+                <a:cs typeface="Arial" pitchFamily="34" charset="-120"/>
               </a:rPr>
               <a:t>Måned og utfall. Raden handler ikke om noen lenger.</a:t>
             </a:r>
@@ -6178,6 +6081,30 @@
           </a:p>
         </p:txBody>
       </p:sp>
+      <p:pic>
+        <p:nvPicPr>
+          <p:cNvPr id="26" name="Image 0" descr="preencoded.png">    </p:cNvPr>
+          <p:cNvPicPr>
+            <a:picLocks noChangeAspect="1"/>
+          </p:cNvPicPr>
+          <p:nvPr/>
+        </p:nvPicPr>
+        <p:blipFill>
+          <a:blip r:embed="rId1"/>
+          <a:stretch>
+            <a:fillRect/>
+          </a:stretch>
+        </p:blipFill>
+        <p:spPr>
+          <a:xfrm>
+            <a:off x="822960" y="6199632"/>
+            <a:ext cx="1143000" cy="110642"/>
+          </a:xfrm>
+          <a:prstGeom prst="rect">
+            <a:avLst/>
+          </a:prstGeom>
+        </p:spPr>
+      </p:pic>
     </p:spTree>
   </p:cSld>
   <p:clrMapOvr>
@@ -6239,9 +6166,9 @@
                 <a:solidFill>
                   <a:srgbClr val="101A2E"/>
                 </a:solidFill>
-                <a:latin typeface="Cambria" pitchFamily="34" charset="0"/>
-                <a:ea typeface="Cambria" pitchFamily="34" charset="-122"/>
-                <a:cs typeface="Cambria" pitchFamily="34" charset="-120"/>
+                <a:latin typeface="Arial" pitchFamily="34" charset="0"/>
+                <a:ea typeface="Arial" pitchFamily="34" charset="-122"/>
+                <a:cs typeface="Arial" pitchFamily="34" charset="-120"/>
               </a:rPr>
               <a:t>Tallene er utledet, ikke valgt</a:t>
             </a:r>
@@ -6278,9 +6205,9 @@
                 <a:solidFill>
                   <a:srgbClr val="4A5568"/>
                 </a:solidFill>
-                <a:latin typeface="Calibri" pitchFamily="34" charset="0"/>
-                <a:ea typeface="Calibri" pitchFamily="34" charset="-122"/>
-                <a:cs typeface="Calibri" pitchFamily="34" charset="-120"/>
+                <a:latin typeface="Arial" pitchFamily="34" charset="0"/>
+                <a:ea typeface="Arial" pitchFamily="34" charset="-122"/>
+                <a:cs typeface="Arial" pitchFamily="34" charset="-120"/>
               </a:rPr>
               <a:t>Brukerne er eldre og pårørende. Det avgjør målene.</a:t>
             </a:r>
@@ -6317,9 +6244,9 @@
                 <a:solidFill>
                   <a:srgbClr val="1F6F5C"/>
                 </a:solidFill>
-                <a:latin typeface="Cambria" pitchFamily="34" charset="0"/>
-                <a:ea typeface="Cambria" pitchFamily="34" charset="-122"/>
-                <a:cs typeface="Cambria" pitchFamily="34" charset="-120"/>
+                <a:latin typeface="Arial" pitchFamily="34" charset="0"/>
+                <a:ea typeface="Arial" pitchFamily="34" charset="-122"/>
+                <a:cs typeface="Arial" pitchFamily="34" charset="-120"/>
               </a:rPr>
               <a:t>7:1</a:t>
             </a:r>
@@ -6356,9 +6283,9 @@
                 <a:solidFill>
                   <a:srgbClr val="101A2E"/>
                 </a:solidFill>
-                <a:latin typeface="Calibri" pitchFamily="34" charset="0"/>
-                <a:ea typeface="Calibri" pitchFamily="34" charset="-122"/>
-                <a:cs typeface="Calibri" pitchFamily="34" charset="-120"/>
+                <a:latin typeface="Arial" pitchFamily="34" charset="0"/>
+                <a:ea typeface="Arial" pitchFamily="34" charset="-122"/>
+                <a:cs typeface="Arial" pitchFamily="34" charset="-120"/>
               </a:rPr>
               <a:t>Kontrast internt</a:t>
             </a:r>
@@ -6398,9 +6325,9 @@
                 <a:solidFill>
                   <a:srgbClr val="4A5568"/>
                 </a:solidFill>
-                <a:latin typeface="Calibri" pitchFamily="34" charset="0"/>
-                <a:ea typeface="Calibri" pitchFamily="34" charset="-122"/>
-                <a:cs typeface="Calibri" pitchFamily="34" charset="-120"/>
+                <a:latin typeface="Arial" pitchFamily="34" charset="0"/>
+                <a:ea typeface="Arial" pitchFamily="34" charset="-122"/>
+                <a:cs typeface="Arial" pitchFamily="34" charset="-120"/>
               </a:rPr>
               <a:t>Kravet i WCAG AA på 4,5:1 er utledet som 3:1 × 1,5 for synsstyrken til en åttiåring – altså null margin for våre brukere</a:t>
             </a:r>
@@ -6437,9 +6364,9 @@
                 <a:solidFill>
                   <a:srgbClr val="1F6F5C"/>
                 </a:solidFill>
-                <a:latin typeface="Cambria" pitchFamily="34" charset="0"/>
-                <a:ea typeface="Cambria" pitchFamily="34" charset="-122"/>
-                <a:cs typeface="Cambria" pitchFamily="34" charset="-120"/>
+                <a:latin typeface="Arial" pitchFamily="34" charset="0"/>
+                <a:ea typeface="Arial" pitchFamily="34" charset="-122"/>
+                <a:cs typeface="Arial" pitchFamily="34" charset="-120"/>
               </a:rPr>
               <a:t>96 px</a:t>
             </a:r>
@@ -6476,9 +6403,9 @@
                 <a:solidFill>
                   <a:srgbClr val="101A2E"/>
                 </a:solidFill>
-                <a:latin typeface="Calibri" pitchFamily="34" charset="0"/>
-                <a:ea typeface="Calibri" pitchFamily="34" charset="-122"/>
-                <a:cs typeface="Calibri" pitchFamily="34" charset="-120"/>
+                <a:latin typeface="Arial" pitchFamily="34" charset="0"/>
+                <a:ea typeface="Arial" pitchFamily="34" charset="-122"/>
+                <a:cs typeface="Arial" pitchFamily="34" charset="-120"/>
               </a:rPr>
               <a:t>Trykkflate</a:t>
             </a:r>
@@ -6518,9 +6445,9 @@
                 <a:solidFill>
                   <a:srgbClr val="4A5568"/>
                 </a:solidFill>
-                <a:latin typeface="Calibri" pitchFamily="34" charset="0"/>
-                <a:ea typeface="Calibri" pitchFamily="34" charset="-122"/>
-                <a:cs typeface="Calibri" pitchFamily="34" charset="-120"/>
+                <a:latin typeface="Arial" pitchFamily="34" charset="0"/>
+                <a:ea typeface="Arial" pitchFamily="34" charset="-122"/>
+                <a:cs typeface="Arial" pitchFamily="34" charset="-120"/>
               </a:rPr>
               <a:t>WCAG krever 24. Førtifire treffes ikke av en hånd som skjelver</a:t>
             </a:r>
@@ -6557,9 +6484,9 @@
                 <a:solidFill>
                   <a:srgbClr val="1F6F5C"/>
                 </a:solidFill>
-                <a:latin typeface="Cambria" pitchFamily="34" charset="0"/>
-                <a:ea typeface="Cambria" pitchFamily="34" charset="-122"/>
-                <a:cs typeface="Cambria" pitchFamily="34" charset="-120"/>
+                <a:latin typeface="Arial" pitchFamily="34" charset="0"/>
+                <a:ea typeface="Arial" pitchFamily="34" charset="-122"/>
+                <a:cs typeface="Arial" pitchFamily="34" charset="-120"/>
               </a:rPr>
               <a:t>200 %</a:t>
             </a:r>
@@ -6596,9 +6523,9 @@
                 <a:solidFill>
                   <a:srgbClr val="101A2E"/>
                 </a:solidFill>
-                <a:latin typeface="Calibri" pitchFamily="34" charset="0"/>
-                <a:ea typeface="Calibri" pitchFamily="34" charset="-122"/>
-                <a:cs typeface="Calibri" pitchFamily="34" charset="-120"/>
+                <a:latin typeface="Arial" pitchFamily="34" charset="0"/>
+                <a:ea typeface="Arial" pitchFamily="34" charset="-122"/>
+                <a:cs typeface="Arial" pitchFamily="34" charset="-120"/>
               </a:rPr>
               <a:t>Skrift uten å flyte</a:t>
             </a:r>
@@ -6638,9 +6565,9 @@
                 <a:solidFill>
                   <a:srgbClr val="4A5568"/>
                 </a:solidFill>
-                <a:latin typeface="Calibri" pitchFamily="34" charset="0"/>
-                <a:ea typeface="Calibri" pitchFamily="34" charset="-122"/>
-                <a:cs typeface="Calibri" pitchFamily="34" charset="-120"/>
+                <a:latin typeface="Arial" pitchFamily="34" charset="0"/>
+                <a:ea typeface="Arial" pitchFamily="34" charset="-122"/>
+                <a:cs typeface="Arial" pitchFamily="34" charset="-120"/>
               </a:rPr>
               <a:t>Norsk brekker der engelsk ikke gjør det. «Funksjonsnedsettelse» får ikke plass på en telefon</a:t>
             </a:r>
@@ -6677,9 +6604,9 @@
                 <a:solidFill>
                   <a:srgbClr val="4A5568"/>
                 </a:solidFill>
-                <a:latin typeface="Calibri" pitchFamily="34" charset="0"/>
-                <a:ea typeface="Calibri" pitchFamily="34" charset="-122"/>
-                <a:cs typeface="Calibri" pitchFamily="34" charset="-120"/>
+                <a:latin typeface="Arial" pitchFamily="34" charset="0"/>
+                <a:ea typeface="Arial" pitchFamily="34" charset="-122"/>
+                <a:cs typeface="Arial" pitchFamily="34" charset="-120"/>
               </a:rPr>
               <a:t>Alle 40 feilmeldinger er role="alert". En sperre uten alternativ blir omgått – og for den som ikke ser skjermen, fantes alternativet aldri.</a:t>
             </a:r>
@@ -6687,59 +6614,30 @@
           </a:p>
         </p:txBody>
       </p:sp>
-      <p:sp>
-        <p:nvSpPr>
-          <p:cNvPr id="14" name="Text 12"/>
-          <p:cNvSpPr/>
-          <p:nvPr/>
-        </p:nvSpPr>
-        <p:spPr>
-          <a:xfrm>
-            <a:off x="822960" y="6172200"/>
-            <a:ext cx="2743200" cy="274320"/>
-          </a:xfrm>
-          <a:prstGeom prst="rect">
-            <a:avLst/>
-          </a:prstGeom>
-          <a:noFill/>
-          <a:ln/>
-        </p:spPr>
-        <p:txBody>
-          <a:bodyPr wrap="square" lIns="0" tIns="0" rIns="0" bIns="0" rtlCol="0" anchor="t"/>
-          <a:lstStyle/>
-          <a:p>
-            <a:pPr indent="0" marL="0">
-              <a:buNone/>
-            </a:pPr>
-            <a:r>
-              <a:rPr lang="en-US" sz="1000" b="1" spc="200" kern="0" dirty="0">
-                <a:solidFill>
-                  <a:srgbClr val="9AA6BB"/>
-                </a:solidFill>
-                <a:latin typeface="Calibri" pitchFamily="34" charset="0"/>
-                <a:ea typeface="Calibri" pitchFamily="34" charset="-122"/>
-                <a:cs typeface="Calibri" pitchFamily="34" charset="-120"/>
-              </a:rPr>
-              <a:t>NAVIAR </a:t>
-            </a:r>
-            <a:pPr indent="0" marL="0">
-              <a:buNone/>
-            </a:pPr>
-            <a:r>
-              <a:rPr lang="en-US" sz="1000" spc="200" kern="0" dirty="0">
-                <a:solidFill>
-                  <a:srgbClr val="9AA6BB"/>
-                </a:solidFill>
-                <a:latin typeface="Calibri" pitchFamily="34" charset="0"/>
-                <a:ea typeface="Calibri" pitchFamily="34" charset="-122"/>
-                <a:cs typeface="Calibri" pitchFamily="34" charset="-120"/>
-              </a:rPr>
-              <a:t>CARE</a:t>
-            </a:r>
-            <a:endParaRPr lang="en-US" sz="1000" dirty="0"/>
-          </a:p>
-        </p:txBody>
-      </p:sp>
+      <p:pic>
+        <p:nvPicPr>
+          <p:cNvPr id="14" name="Image 0" descr="preencoded.png">    </p:cNvPr>
+          <p:cNvPicPr>
+            <a:picLocks noChangeAspect="1"/>
+          </p:cNvPicPr>
+          <p:nvPr/>
+        </p:nvPicPr>
+        <p:blipFill>
+          <a:blip r:embed="rId1"/>
+          <a:stretch>
+            <a:fillRect/>
+          </a:stretch>
+        </p:blipFill>
+        <p:spPr>
+          <a:xfrm>
+            <a:off x="822960" y="6199632"/>
+            <a:ext cx="1143000" cy="110642"/>
+          </a:xfrm>
+          <a:prstGeom prst="rect">
+            <a:avLst/>
+          </a:prstGeom>
+        </p:spPr>
+      </p:pic>
     </p:spTree>
   </p:cSld>
   <p:clrMapOvr>
@@ -6801,9 +6699,9 @@
                 <a:solidFill>
                   <a:srgbClr val="101A2E"/>
                 </a:solidFill>
-                <a:latin typeface="Cambria" pitchFamily="34" charset="0"/>
-                <a:ea typeface="Cambria" pitchFamily="34" charset="-122"/>
-                <a:cs typeface="Cambria" pitchFamily="34" charset="-120"/>
+                <a:latin typeface="Arial" pitchFamily="34" charset="0"/>
+                <a:ea typeface="Arial" pitchFamily="34" charset="-122"/>
+                <a:cs typeface="Arial" pitchFamily="34" charset="-120"/>
               </a:rPr>
               <a:t>To tjenester under ett merke</a:t>
             </a:r>
@@ -6867,9 +6765,9 @@
                 <a:solidFill>
                   <a:srgbClr val="1F6F5C"/>
                 </a:solidFill>
-                <a:latin typeface="Cambria" pitchFamily="34" charset="0"/>
-                <a:ea typeface="Cambria" pitchFamily="34" charset="-122"/>
-                <a:cs typeface="Cambria" pitchFamily="34" charset="-120"/>
+                <a:latin typeface="Arial" pitchFamily="34" charset="0"/>
+                <a:ea typeface="Arial" pitchFamily="34" charset="-122"/>
+                <a:cs typeface="Arial" pitchFamily="34" charset="-120"/>
               </a:rPr>
               <a:t>Besøksbekreftelse</a:t>
             </a:r>
@@ -6906,9 +6804,9 @@
                 <a:solidFill>
                   <a:srgbClr val="101A2E"/>
                 </a:solidFill>
-                <a:latin typeface="Calibri" pitchFamily="34" charset="0"/>
-                <a:ea typeface="Calibri" pitchFamily="34" charset="-122"/>
-                <a:cs typeface="Calibri" pitchFamily="34" charset="-120"/>
+                <a:latin typeface="Arial" pitchFamily="34" charset="0"/>
+                <a:ea typeface="Arial" pitchFamily="34" charset="-122"/>
+                <a:cs typeface="Arial" pitchFamily="34" charset="-120"/>
               </a:rPr>
               <a:t>«Ett besøk. Én bekreftelse. Alle vet det.»</a:t>
             </a:r>
@@ -6945,9 +6843,9 @@
                 <a:solidFill>
                   <a:srgbClr val="4A5568"/>
                 </a:solidFill>
-                <a:latin typeface="Calibri" pitchFamily="34" charset="0"/>
-                <a:ea typeface="Calibri" pitchFamily="34" charset="-122"/>
-                <a:cs typeface="Calibri" pitchFamily="34" charset="-120"/>
+                <a:latin typeface="Arial" pitchFamily="34" charset="0"/>
+                <a:ea typeface="Arial" pitchFamily="34" charset="-122"/>
+                <a:cs typeface="Arial" pitchFamily="34" charset="-120"/>
               </a:rPr>
               <a:t>Betaler</a:t>
             </a:r>
@@ -6984,9 +6882,9 @@
                 <a:solidFill>
                   <a:srgbClr val="101A2E"/>
                 </a:solidFill>
-                <a:latin typeface="Calibri" pitchFamily="34" charset="0"/>
-                <a:ea typeface="Calibri" pitchFamily="34" charset="-122"/>
-                <a:cs typeface="Calibri" pitchFamily="34" charset="-120"/>
+                <a:latin typeface="Arial" pitchFamily="34" charset="0"/>
+                <a:ea typeface="Arial" pitchFamily="34" charset="-122"/>
+                <a:cs typeface="Arial" pitchFamily="34" charset="-120"/>
               </a:rPr>
               <a:t>Leverandøren</a:t>
             </a:r>
@@ -7023,9 +6921,9 @@
                 <a:solidFill>
                   <a:srgbClr val="4A5568"/>
                 </a:solidFill>
-                <a:latin typeface="Calibri" pitchFamily="34" charset="0"/>
-                <a:ea typeface="Calibri" pitchFamily="34" charset="-122"/>
-                <a:cs typeface="Calibri" pitchFamily="34" charset="-120"/>
+                <a:latin typeface="Arial" pitchFamily="34" charset="0"/>
+                <a:ea typeface="Arial" pitchFamily="34" charset="-122"/>
+                <a:cs typeface="Arial" pitchFamily="34" charset="-120"/>
               </a:rPr>
               <a:t>Selges som</a:t>
             </a:r>
@@ -7062,9 +6960,9 @@
                 <a:solidFill>
                   <a:srgbClr val="101A2E"/>
                 </a:solidFill>
-                <a:latin typeface="Calibri" pitchFamily="34" charset="0"/>
-                <a:ea typeface="Calibri" pitchFamily="34" charset="-122"/>
-                <a:cs typeface="Calibri" pitchFamily="34" charset="-120"/>
+                <a:latin typeface="Arial" pitchFamily="34" charset="0"/>
+                <a:ea typeface="Arial" pitchFamily="34" charset="-122"/>
+                <a:cs typeface="Arial" pitchFamily="34" charset="-120"/>
               </a:rPr>
               <a:t>Programvare per leverandør</a:t>
             </a:r>
@@ -7101,9 +6999,9 @@
                 <a:solidFill>
                   <a:srgbClr val="4A5568"/>
                 </a:solidFill>
-                <a:latin typeface="Calibri" pitchFamily="34" charset="0"/>
-                <a:ea typeface="Calibri" pitchFamily="34" charset="-122"/>
-                <a:cs typeface="Calibri" pitchFamily="34" charset="-120"/>
+                <a:latin typeface="Arial" pitchFamily="34" charset="0"/>
+                <a:ea typeface="Arial" pitchFamily="34" charset="-122"/>
+                <a:cs typeface="Arial" pitchFamily="34" charset="-120"/>
               </a:rPr>
               <a:t>Status</a:t>
             </a:r>
@@ -7140,9 +7038,9 @@
                 <a:solidFill>
                   <a:srgbClr val="101A2E"/>
                 </a:solidFill>
-                <a:latin typeface="Calibri" pitchFamily="34" charset="0"/>
-                <a:ea typeface="Calibri" pitchFamily="34" charset="-122"/>
-                <a:cs typeface="Calibri" pitchFamily="34" charset="-120"/>
+                <a:latin typeface="Arial" pitchFamily="34" charset="0"/>
+                <a:ea typeface="Arial" pitchFamily="34" charset="-122"/>
+                <a:cs typeface="Arial" pitchFamily="34" charset="-120"/>
               </a:rPr>
               <a:t>I drift som pilot</a:t>
             </a:r>
@@ -7171,7 +7069,7 @@
           </a:solidFill>
           <a:ln w="12700">
             <a:solidFill>
-              <a:srgbClr val="E4DCCF"/>
+              <a:srgbClr val="DDE2EA"/>
             </a:solidFill>
             <a:prstDash val="solid"/>
           </a:ln>
@@ -7206,9 +7104,9 @@
                 <a:solidFill>
                   <a:srgbClr val="101A2E"/>
                 </a:solidFill>
-                <a:latin typeface="Cambria" pitchFamily="34" charset="0"/>
-                <a:ea typeface="Cambria" pitchFamily="34" charset="-122"/>
-                <a:cs typeface="Cambria" pitchFamily="34" charset="-120"/>
+                <a:latin typeface="Arial" pitchFamily="34" charset="0"/>
+                <a:ea typeface="Arial" pitchFamily="34" charset="-122"/>
+                <a:cs typeface="Arial" pitchFamily="34" charset="-120"/>
               </a:rPr>
               <a:t>Klarhet 45</a:t>
             </a:r>
@@ -7245,9 +7143,9 @@
                 <a:solidFill>
                   <a:srgbClr val="101A2E"/>
                 </a:solidFill>
-                <a:latin typeface="Calibri" pitchFamily="34" charset="0"/>
-                <a:ea typeface="Calibri" pitchFamily="34" charset="-122"/>
-                <a:cs typeface="Calibri" pitchFamily="34" charset="-120"/>
+                <a:latin typeface="Arial" pitchFamily="34" charset="0"/>
+                <a:ea typeface="Arial" pitchFamily="34" charset="-122"/>
+                <a:cs typeface="Arial" pitchFamily="34" charset="-120"/>
               </a:rPr>
               <a:t>«Én samtale. Tre tydelige neste steg.»</a:t>
             </a:r>
@@ -7284,9 +7182,9 @@
                 <a:solidFill>
                   <a:srgbClr val="4A5568"/>
                 </a:solidFill>
-                <a:latin typeface="Calibri" pitchFamily="34" charset="0"/>
-                <a:ea typeface="Calibri" pitchFamily="34" charset="-122"/>
-                <a:cs typeface="Calibri" pitchFamily="34" charset="-120"/>
+                <a:latin typeface="Arial" pitchFamily="34" charset="0"/>
+                <a:ea typeface="Arial" pitchFamily="34" charset="-122"/>
+                <a:cs typeface="Arial" pitchFamily="34" charset="-120"/>
               </a:rPr>
               <a:t>Betaler</a:t>
             </a:r>
@@ -7323,9 +7221,9 @@
                 <a:solidFill>
                   <a:srgbClr val="101A2E"/>
                 </a:solidFill>
-                <a:latin typeface="Calibri" pitchFamily="34" charset="0"/>
-                <a:ea typeface="Calibri" pitchFamily="34" charset="-122"/>
-                <a:cs typeface="Calibri" pitchFamily="34" charset="-120"/>
+                <a:latin typeface="Arial" pitchFamily="34" charset="0"/>
+                <a:ea typeface="Arial" pitchFamily="34" charset="-122"/>
+                <a:cs typeface="Arial" pitchFamily="34" charset="-120"/>
               </a:rPr>
               <a:t>Familien eller den eldre</a:t>
             </a:r>
@@ -7362,9 +7260,9 @@
                 <a:solidFill>
                   <a:srgbClr val="4A5568"/>
                 </a:solidFill>
-                <a:latin typeface="Calibri" pitchFamily="34" charset="0"/>
-                <a:ea typeface="Calibri" pitchFamily="34" charset="-122"/>
-                <a:cs typeface="Calibri" pitchFamily="34" charset="-120"/>
+                <a:latin typeface="Arial" pitchFamily="34" charset="0"/>
+                <a:ea typeface="Arial" pitchFamily="34" charset="-122"/>
+                <a:cs typeface="Arial" pitchFamily="34" charset="-120"/>
               </a:rPr>
               <a:t>Selges som</a:t>
             </a:r>
@@ -7401,9 +7299,9 @@
                 <a:solidFill>
                   <a:srgbClr val="101A2E"/>
                 </a:solidFill>
-                <a:latin typeface="Calibri" pitchFamily="34" charset="0"/>
-                <a:ea typeface="Calibri" pitchFamily="34" charset="-122"/>
-                <a:cs typeface="Calibri" pitchFamily="34" charset="-120"/>
+                <a:latin typeface="Arial" pitchFamily="34" charset="0"/>
+                <a:ea typeface="Arial" pitchFamily="34" charset="-122"/>
+                <a:cs typeface="Arial" pitchFamily="34" charset="-120"/>
               </a:rPr>
               <a:t>599 kr for 45 minutter</a:t>
             </a:r>
@@ -7440,9 +7338,9 @@
                 <a:solidFill>
                   <a:srgbClr val="4A5568"/>
                 </a:solidFill>
-                <a:latin typeface="Calibri" pitchFamily="34" charset="0"/>
-                <a:ea typeface="Calibri" pitchFamily="34" charset="-122"/>
-                <a:cs typeface="Calibri" pitchFamily="34" charset="-120"/>
+                <a:latin typeface="Arial" pitchFamily="34" charset="0"/>
+                <a:ea typeface="Arial" pitchFamily="34" charset="-122"/>
+                <a:cs typeface="Arial" pitchFamily="34" charset="-120"/>
               </a:rPr>
               <a:t>Status</a:t>
             </a:r>
@@ -7479,9 +7377,9 @@
                 <a:solidFill>
                   <a:srgbClr val="101A2E"/>
                 </a:solidFill>
-                <a:latin typeface="Calibri" pitchFamily="34" charset="0"/>
-                <a:ea typeface="Calibri" pitchFamily="34" charset="-122"/>
-                <a:cs typeface="Calibri" pitchFamily="34" charset="-120"/>
+                <a:latin typeface="Arial" pitchFamily="34" charset="0"/>
+                <a:ea typeface="Arial" pitchFamily="34" charset="-122"/>
+                <a:cs typeface="Arial" pitchFamily="34" charset="-120"/>
               </a:rPr>
               <a:t>Betaling sperret til fire punkter er avklart</a:t>
             </a:r>
@@ -7516,11 +7414,11 @@
             <a:r>
               <a:rPr lang="en-US" sz="1350" i="1" dirty="0">
                 <a:solidFill>
-                  <a:srgbClr val="A9591C"/>
-                </a:solidFill>
-                <a:latin typeface="Calibri" pitchFamily="34" charset="0"/>
-                <a:ea typeface="Calibri" pitchFamily="34" charset="-122"/>
-                <a:cs typeface="Calibri" pitchFamily="34" charset="-120"/>
+                  <a:srgbClr val="9A6A08"/>
+                </a:solidFill>
+                <a:latin typeface="Arial" pitchFamily="34" charset="0"/>
+                <a:ea typeface="Arial" pitchFamily="34" charset="-122"/>
+                <a:cs typeface="Arial" pitchFamily="34" charset="-120"/>
               </a:rPr>
               <a:t>Legekonsultasjon er tegnet, beskrevet og bevisst ikke bygget: vurdering av symptomer er helsehjelp.</a:t>
             </a:r>
@@ -7528,6 +7426,30 @@
           </a:p>
         </p:txBody>
       </p:sp>
+      <p:pic>
+        <p:nvPicPr>
+          <p:cNvPr id="22" name="Image 0" descr="preencoded.png">    </p:cNvPr>
+          <p:cNvPicPr>
+            <a:picLocks noChangeAspect="1"/>
+          </p:cNvPicPr>
+          <p:nvPr/>
+        </p:nvPicPr>
+        <p:blipFill>
+          <a:blip r:embed="rId1"/>
+          <a:stretch>
+            <a:fillRect/>
+          </a:stretch>
+        </p:blipFill>
+        <p:spPr>
+          <a:xfrm>
+            <a:off x="822960" y="6199632"/>
+            <a:ext cx="1143000" cy="110642"/>
+          </a:xfrm>
+          <a:prstGeom prst="rect">
+            <a:avLst/>
+          </a:prstGeom>
+        </p:spPr>
+      </p:pic>
     </p:spTree>
   </p:cSld>
   <p:clrMapOvr>

--- a/docs/presentasjon/naviar-konsept.pptx
+++ b/docs/presentasjon/naviar-konsept.pptx
@@ -2048,7 +2048,7 @@
                 <a:ea typeface="Arial" pitchFamily="34" charset="-122"/>
                 <a:cs typeface="Arial" pitchFamily="34" charset="-120"/>
               </a:rPr>
-              <a:t>324</a:t>
+              <a:t>327</a:t>
             </a:r>
             <a:endParaRPr lang="en-US" sz="4400" dirty="0"/>
           </a:p>

--- a/docs/presentasjon/naviar-konsept.pptx
+++ b/docs/presentasjon/naviar-konsept.pptx
@@ -2048,7 +2048,7 @@
                 <a:ea typeface="Arial" pitchFamily="34" charset="-122"/>
                 <a:cs typeface="Arial" pitchFamily="34" charset="-120"/>
               </a:rPr>
-              <a:t>327</a:t>
+              <a:t>329</a:t>
             </a:r>
             <a:endParaRPr lang="en-US" sz="4400" dirty="0"/>
           </a:p>
